--- a/NDC-Oslo-Copilot-Workshop.pptx
+++ b/NDC-Oslo-Copilot-Workshop.pptx
@@ -3601,20 +3601,20 @@
         <p:spPr>
           <a:xfrm>
             <a:off x="731520" y="548640"/>
-            <a:ext cx="4206240" cy="274320"/>
-          </a:xfrm>
-          <a:prstGeom prst="rect">
-            <a:avLst/>
-          </a:prstGeom>
-        </p:spPr>
-        <p:txBody>
-          <a:bodyPr wrap="square" rtlCol="0">
-            <a:spAutoFit/>
-          </a:bodyPr>
-          <a:lstStyle/>
-          <a:p>
-            <a:r>
-              <a:rPr b="1" sz="1300" spc="120">
+            <a:ext cx="4572000" cy="310896"/>
+          </a:xfrm>
+          <a:prstGeom prst="rect">
+            <a:avLst/>
+          </a:prstGeom>
+        </p:spPr>
+        <p:txBody>
+          <a:bodyPr wrap="square" rtlCol="0">
+            <a:spAutoFit/>
+          </a:bodyPr>
+          <a:lstStyle/>
+          <a:p>
+            <a:r>
+              <a:rPr b="1" sz="1500" spc="260">
                 <a:solidFill>
                   <a:srgbClr val="1746D1"/>
                 </a:solidFill>
@@ -3633,21 +3633,21 @@
         </p:nvSpPr>
         <p:spPr>
           <a:xfrm>
-            <a:off x="731520" y="1371600"/>
-            <a:ext cx="4206240" cy="1737360"/>
-          </a:xfrm>
-          <a:prstGeom prst="rect">
-            <a:avLst/>
-          </a:prstGeom>
-        </p:spPr>
-        <p:txBody>
-          <a:bodyPr wrap="square" rtlCol="0">
-            <a:spAutoFit/>
-          </a:bodyPr>
-          <a:lstStyle/>
-          <a:p>
-            <a:r>
-              <a:rPr b="1" sz="4200" spc="-100">
+            <a:off x="731520" y="1280160"/>
+            <a:ext cx="4572000" cy="1828800"/>
+          </a:xfrm>
+          <a:prstGeom prst="rect">
+            <a:avLst/>
+          </a:prstGeom>
+        </p:spPr>
+        <p:txBody>
+          <a:bodyPr wrap="square" rtlCol="0">
+            <a:spAutoFit/>
+          </a:bodyPr>
+          <a:lstStyle/>
+          <a:p>
+            <a:r>
+              <a:rPr b="1" sz="5000" spc="-100">
                 <a:solidFill>
                   <a:srgbClr val="172033"/>
                 </a:solidFill>
@@ -3658,7 +3658,7 @@
           </a:p>
           <a:p>
             <a:r>
-              <a:rPr b="1" sz="4200" spc="-100">
+              <a:rPr b="1" sz="5000" spc="-100">
                 <a:solidFill>
                   <a:srgbClr val="1746D1"/>
                 </a:solidFill>
@@ -3677,38 +3677,38 @@
         </p:nvSpPr>
         <p:spPr>
           <a:xfrm>
-            <a:off x="731520" y="3429000"/>
-            <a:ext cx="4206240" cy="914400"/>
-          </a:xfrm>
-          <a:prstGeom prst="rect">
-            <a:avLst/>
-          </a:prstGeom>
-        </p:spPr>
-        <p:txBody>
-          <a:bodyPr wrap="square" rtlCol="0">
-            <a:spAutoFit/>
-          </a:bodyPr>
-          <a:lstStyle/>
-          <a:p>
-            <a:r>
-              <a:rPr sz="2000">
-                <a:solidFill>
-                  <a:srgbClr val="5A6578"/>
-                </a:solidFill>
-                <a:latin typeface="Aptos"/>
-              </a:rPr>
-              <a:t>Two tracks. One agentic development journey.</a:t>
-            </a:r>
-          </a:p>
-          <a:p>
-            <a:r>
-              <a:rPr sz="2000">
-                <a:solidFill>
-                  <a:srgbClr val="5A6578"/>
-                </a:solidFill>
-                <a:latin typeface="Aptos"/>
-              </a:rPr>
-              <a:t>Start in VS Code, then move to the GitHub Copilot app.</a:t>
+            <a:off x="731520" y="3520440"/>
+            <a:ext cx="4572000" cy="1188720"/>
+          </a:xfrm>
+          <a:prstGeom prst="rect">
+            <a:avLst/>
+          </a:prstGeom>
+        </p:spPr>
+        <p:txBody>
+          <a:bodyPr wrap="square" rtlCol="0">
+            <a:spAutoFit/>
+          </a:bodyPr>
+          <a:lstStyle/>
+          <a:p>
+            <a:r>
+              <a:rPr sz="2100">
+                <a:solidFill>
+                  <a:srgbClr val="455166"/>
+                </a:solidFill>
+                <a:latin typeface="Aptos"/>
+              </a:rPr>
+              <a:t>Two tracks. One agentic journey.</a:t>
+            </a:r>
+          </a:p>
+          <a:p>
+            <a:r>
+              <a:rPr sz="2100">
+                <a:solidFill>
+                  <a:srgbClr val="455166"/>
+                </a:solidFill>
+                <a:latin typeface="Aptos"/>
+              </a:rPr>
+              <a:t>VS Code first, then the Copilot app.</a:t>
             </a:r>
           </a:p>
         </p:txBody>
@@ -3722,20 +3722,20 @@
         <p:spPr>
           <a:xfrm>
             <a:off x="731520" y="5486400"/>
-            <a:ext cx="4206240" cy="548640"/>
-          </a:xfrm>
-          <a:prstGeom prst="rect">
-            <a:avLst/>
-          </a:prstGeom>
-        </p:spPr>
-        <p:txBody>
-          <a:bodyPr wrap="square" rtlCol="0">
-            <a:spAutoFit/>
-          </a:bodyPr>
-          <a:lstStyle/>
-          <a:p>
-            <a:r>
-              <a:rPr b="1" sz="1400">
+            <a:ext cx="4572000" cy="320040"/>
+          </a:xfrm>
+          <a:prstGeom prst="rect">
+            <a:avLst/>
+          </a:prstGeom>
+        </p:spPr>
+        <p:txBody>
+          <a:bodyPr wrap="square" rtlCol="0">
+            <a:spAutoFit/>
+          </a:bodyPr>
+          <a:lstStyle/>
+          <a:p>
+            <a:r>
+              <a:rPr b="1" sz="1700" spc="80">
                 <a:solidFill>
                   <a:srgbClr val="172033"/>
                 </a:solidFill>
@@ -3768,11 +3768,11 @@
           <a:lstStyle/>
           <a:p>
             <a:r>
-              <a:rPr b="1" sz="2400">
+              <a:rPr b="1" sz="2400" spc="80">
                 <a:solidFill>
                   <a:srgbClr val="F8FAFC"/>
                 </a:solidFill>
-                <a:latin typeface="Aptos Display"/>
+                <a:latin typeface="Aptos"/>
               </a:rPr>
               <a:t>01  VS CODE</a:t>
             </a:r>
@@ -3801,11 +3801,11 @@
           <a:lstStyle/>
           <a:p>
             <a:r>
-              <a:rPr b="1" sz="2400">
+              <a:rPr b="1" sz="2400" spc="80">
                 <a:solidFill>
                   <a:srgbClr val="F8FAFC"/>
                 </a:solidFill>
-                <a:latin typeface="Aptos Display"/>
+                <a:latin typeface="Aptos"/>
               </a:rPr>
               <a:t>02  COPILOT APP</a:t>
             </a:r>
@@ -3834,13 +3834,13 @@
           <a:lstStyle/>
           <a:p>
             <a:r>
-              <a:rPr b="1" sz="1100" spc="110">
+              <a:rPr b="1" sz="1300" spc="160">
                 <a:solidFill>
                   <a:srgbClr val="C9D8FF"/>
                 </a:solidFill>
                 <a:latin typeface="Aptos"/>
               </a:rPr>
-              <a:t>TWO CONNECTED WORK SURFACES</a:t>
+              <a:t>TWO WORK SURFACES</a:t>
             </a:r>
           </a:p>
         </p:txBody>
@@ -3853,21 +3853,21 @@
         </p:nvSpPr>
         <p:spPr>
           <a:xfrm>
-            <a:off x="731520" y="6309360"/>
-            <a:ext cx="4206240" cy="274320"/>
-          </a:xfrm>
-          <a:prstGeom prst="rect">
-            <a:avLst/>
-          </a:prstGeom>
-        </p:spPr>
-        <p:txBody>
-          <a:bodyPr wrap="square" rtlCol="0">
-            <a:spAutoFit/>
-          </a:bodyPr>
-          <a:lstStyle/>
-          <a:p>
-            <a:r>
-              <a:rPr b="1" sz="1400">
+            <a:off x="731520" y="6255552"/>
+            <a:ext cx="4572000" cy="320040"/>
+          </a:xfrm>
+          <a:prstGeom prst="rect">
+            <a:avLst/>
+          </a:prstGeom>
+        </p:spPr>
+        <p:txBody>
+          <a:bodyPr wrap="square" rtlCol="0">
+            <a:spAutoFit/>
+          </a:bodyPr>
+          <a:lstStyle/>
+          <a:p>
+            <a:r>
+              <a:rPr b="1" sz="1700">
                 <a:solidFill>
                   <a:srgbClr val="1746D1"/>
                 </a:solidFill>
@@ -4909,21 +4909,21 @@
         </p:nvSpPr>
         <p:spPr>
           <a:xfrm>
-            <a:off x="960120" y="365760"/>
-            <a:ext cx="5486400" cy="274320"/>
-          </a:xfrm>
-          <a:prstGeom prst="rect">
-            <a:avLst/>
-          </a:prstGeom>
-        </p:spPr>
-        <p:txBody>
-          <a:bodyPr wrap="square" rtlCol="0">
-            <a:spAutoFit/>
-          </a:bodyPr>
-          <a:lstStyle/>
-          <a:p>
-            <a:r>
-              <a:rPr b="1" sz="1200" spc="120">
+            <a:off x="960120" y="347472"/>
+            <a:ext cx="6858000" cy="310896"/>
+          </a:xfrm>
+          <a:prstGeom prst="rect">
+            <a:avLst/>
+          </a:prstGeom>
+        </p:spPr>
+        <p:txBody>
+          <a:bodyPr wrap="square" rtlCol="0">
+            <a:spAutoFit/>
+          </a:bodyPr>
+          <a:lstStyle/>
+          <a:p>
+            <a:r>
+              <a:rPr b="1" sz="1500" spc="240">
                 <a:solidFill>
                   <a:srgbClr val="1746D1"/>
                 </a:solidFill>
@@ -4942,21 +4942,21 @@
         </p:nvSpPr>
         <p:spPr>
           <a:xfrm>
-            <a:off x="685800" y="868680"/>
-            <a:ext cx="7772400" cy="1005840"/>
-          </a:xfrm>
-          <a:prstGeom prst="rect">
-            <a:avLst/>
-          </a:prstGeom>
-        </p:spPr>
-        <p:txBody>
-          <a:bodyPr wrap="square" rtlCol="0">
-            <a:spAutoFit/>
-          </a:bodyPr>
-          <a:lstStyle/>
-          <a:p>
-            <a:r>
-              <a:rPr b="1" sz="3400" spc="-80">
+            <a:off x="685800" y="754380"/>
+            <a:ext cx="7772400" cy="1188720"/>
+          </a:xfrm>
+          <a:prstGeom prst="rect">
+            <a:avLst/>
+          </a:prstGeom>
+        </p:spPr>
+        <p:txBody>
+          <a:bodyPr wrap="square" rtlCol="0">
+            <a:spAutoFit/>
+          </a:bodyPr>
+          <a:lstStyle/>
+          <a:p>
+            <a:r>
+              <a:rPr b="1" sz="4200" spc="-60">
                 <a:solidFill>
                   <a:srgbClr val="172033"/>
                 </a:solidFill>
@@ -4975,18 +4975,29 @@
         </p:nvSpPr>
         <p:spPr>
           <a:xfrm>
-            <a:off x="685800" y="2103120"/>
-            <a:ext cx="7772400" cy="2377440"/>
-          </a:xfrm>
-          <a:prstGeom prst="rect">
-            <a:avLst/>
-          </a:prstGeom>
-        </p:spPr>
-        <p:txBody>
-          <a:bodyPr wrap="square" rtlCol="0">
-            <a:spAutoFit/>
-          </a:bodyPr>
-          <a:lstStyle/>
+            <a:off x="1371600" y="2377440"/>
+            <a:ext cx="7086600" cy="792480"/>
+          </a:xfrm>
+          <a:prstGeom prst="rect">
+            <a:avLst/>
+          </a:prstGeom>
+        </p:spPr>
+        <p:txBody>
+          <a:bodyPr wrap="square" rtlCol="0">
+            <a:spAutoFit/>
+          </a:bodyPr>
+          <a:lstStyle/>
+          <a:p>
+            <a:r>
+              <a:rPr b="1" sz="2400">
+                <a:solidFill>
+                  <a:srgbClr val="172033"/>
+                </a:solidFill>
+                <a:latin typeface="Aptos"/>
+              </a:rPr>
+              <a:t>Copilot in VS Code</a:t>
+            </a:r>
+          </a:p>
           <a:p>
             <a:r>
               <a:rPr b="1" sz="1600">
@@ -4995,29 +5006,18 @@
                 </a:solidFill>
                 <a:latin typeface="Aptos"/>
               </a:rPr>
-              <a:t>https://code.visualstudio.com/docs/copilot/overview</a:t>
-            </a:r>
-          </a:p>
-          <a:p>
-            <a:r>
-              <a:rPr b="1" sz="1600">
+              <a:t>code.visualstudio.com/docs/copilot/overview</a:t>
+            </a:r>
+          </a:p>
+          <a:p>
+            <a:r>
+              <a:rPr b="1" sz="600">
                 <a:solidFill>
                   <a:srgbClr val="1746D1"/>
                 </a:solidFill>
                 <a:latin typeface="Aptos"/>
               </a:rPr>
-              <a:t>https://code.visualstudio.com/docs/copilot/chat/chat-agent-mode</a:t>
-            </a:r>
-          </a:p>
-          <a:p>
-            <a:r>
-              <a:rPr b="1" sz="1600">
-                <a:solidFill>
-                  <a:srgbClr val="1746D1"/>
-                </a:solidFill>
-                <a:latin typeface="Aptos"/>
-              </a:rPr>
-              <a:t>https://code.visualstudio.com/docs/copilot/customization/custom-agents</a:t>
+              <a:t xml:space="preserve"> </a:t>
             </a:r>
           </a:p>
         </p:txBody>
@@ -5045,81 +5045,349 @@
           <a:lstStyle/>
           <a:p>
             <a:r>
+              <a:rPr b="1" sz="1900">
+                <a:solidFill>
+                  <a:srgbClr val="1746D1"/>
+                </a:solidFill>
+                <a:latin typeface="Aptos"/>
+              </a:rPr>
+              <a:t>MORE  ·  github.com/github/awesome-copilot</a:t>
+            </a:r>
+          </a:p>
+        </p:txBody>
+      </p:sp>
+      <p:sp>
+        <p:nvSpPr>
+          <p:cNvPr id="9" name="TextBox 9"/>
+          <p:cNvSpPr txBox="1"/>
+          <p:nvPr/>
+        </p:nvSpPr>
+        <p:spPr>
+          <a:xfrm>
+            <a:off x="685800" y="6300216"/>
+            <a:ext cx="6858000" cy="320040"/>
+          </a:xfrm>
+          <a:prstGeom prst="rect">
+            <a:avLst/>
+          </a:prstGeom>
+        </p:spPr>
+        <p:txBody>
+          <a:bodyPr wrap="square" rtlCol="0">
+            <a:spAutoFit/>
+          </a:bodyPr>
+          <a:lstStyle/>
+          <a:p>
+            <a:r>
+              <a:rPr b="1" sz="1200" spc="120">
+                <a:solidFill>
+                  <a:srgbClr val="7A8497"/>
+                </a:solidFill>
+                <a:latin typeface="Aptos"/>
+              </a:rPr>
+              <a:t>NDC OSLO × GITHUB COPILOT WORKSHOP</a:t>
+            </a:r>
+          </a:p>
+        </p:txBody>
+      </p:sp>
+      <p:sp>
+        <p:nvSpPr>
+          <p:cNvPr id="10" name="TextBox 10"/>
+          <p:cNvSpPr txBox="1"/>
+          <p:nvPr/>
+        </p:nvSpPr>
+        <p:spPr>
+          <a:xfrm>
+            <a:off x="8046720" y="6300216"/>
+            <a:ext cx="640080" cy="320040"/>
+          </a:xfrm>
+          <a:prstGeom prst="rect">
+            <a:avLst/>
+          </a:prstGeom>
+        </p:spPr>
+        <p:txBody>
+          <a:bodyPr wrap="square" rtlCol="0">
+            <a:spAutoFit/>
+          </a:bodyPr>
+          <a:lstStyle/>
+          <a:p>
+            <a:r>
+              <a:rPr b="1" sz="1300">
+                <a:solidFill>
+                  <a:srgbClr val="1746D1"/>
+                </a:solidFill>
+                <a:latin typeface="Aptos"/>
+              </a:rPr>
+              <a:t>06</a:t>
+            </a:r>
+          </a:p>
+        </p:txBody>
+      </p:sp>
+      <p:sp>
+        <p:nvSpPr>
+          <p:cNvPr id="11" name="TextBox 11"/>
+          <p:cNvSpPr txBox="1"/>
+          <p:nvPr/>
+        </p:nvSpPr>
+        <p:spPr>
+          <a:xfrm>
+            <a:off x="1371600" y="3200400"/>
+            <a:ext cx="7086600" cy="792480"/>
+          </a:xfrm>
+          <a:prstGeom prst="rect">
+            <a:avLst/>
+          </a:prstGeom>
+        </p:spPr>
+        <p:txBody>
+          <a:bodyPr wrap="square" rtlCol="0">
+            <a:spAutoFit/>
+          </a:bodyPr>
+          <a:lstStyle/>
+          <a:p>
+            <a:r>
+              <a:rPr b="1" sz="2400">
+                <a:solidFill>
+                  <a:srgbClr val="172033"/>
+                </a:solidFill>
+                <a:latin typeface="Aptos"/>
+              </a:rPr>
+              <a:t>Agent mode</a:t>
+            </a:r>
+          </a:p>
+          <a:p>
+            <a:r>
               <a:rPr b="1" sz="1600">
                 <a:solidFill>
                   <a:srgbClr val="1746D1"/>
                 </a:solidFill>
                 <a:latin typeface="Aptos"/>
               </a:rPr>
-              <a:t>MORE CUSTOMIZATIONS  ·  https://github.com/github/awesome-copilot</a:t>
-            </a:r>
-          </a:p>
-        </p:txBody>
-      </p:sp>
-      <p:sp>
-        <p:nvSpPr>
-          <p:cNvPr id="9" name="TextBox 9"/>
-          <p:cNvSpPr txBox="1"/>
-          <p:nvPr/>
-        </p:nvSpPr>
-        <p:spPr>
-          <a:xfrm>
-            <a:off x="685800" y="6355080"/>
-            <a:ext cx="6858000" cy="274320"/>
-          </a:xfrm>
-          <a:prstGeom prst="rect">
-            <a:avLst/>
-          </a:prstGeom>
-        </p:spPr>
-        <p:txBody>
-          <a:bodyPr wrap="square" rtlCol="0">
-            <a:spAutoFit/>
-          </a:bodyPr>
-          <a:lstStyle/>
-          <a:p>
-            <a:r>
-              <a:rPr b="1" sz="1000" spc="80">
-                <a:solidFill>
-                  <a:srgbClr val="7A8497"/>
-                </a:solidFill>
-                <a:latin typeface="Aptos"/>
-              </a:rPr>
-              <a:t>NDC OSLO × GITHUB COPILOT WORKSHOP</a:t>
-            </a:r>
-          </a:p>
-        </p:txBody>
-      </p:sp>
-      <p:sp>
-        <p:nvSpPr>
-          <p:cNvPr id="10" name="TextBox 10"/>
-          <p:cNvSpPr txBox="1"/>
-          <p:nvPr/>
-        </p:nvSpPr>
-        <p:spPr>
-          <a:xfrm>
-            <a:off x="8230000" y="6355080"/>
-            <a:ext cx="457200" cy="274320"/>
-          </a:xfrm>
-          <a:prstGeom prst="rect">
-            <a:avLst/>
-          </a:prstGeom>
-        </p:spPr>
-        <p:txBody>
-          <a:bodyPr wrap="square" rtlCol="0">
-            <a:spAutoFit/>
-          </a:bodyPr>
-          <a:lstStyle/>
-          <a:p>
-            <a:r>
-              <a:rPr b="1" sz="1000">
+              <a:t>code.visualstudio.com/docs/copilot/chat/chat-agent-mode</a:t>
+            </a:r>
+          </a:p>
+        </p:txBody>
+      </p:sp>
+      <p:sp>
+        <p:nvSpPr>
+          <p:cNvPr id="12" name="TextBox 12"/>
+          <p:cNvSpPr txBox="1"/>
+          <p:nvPr/>
+        </p:nvSpPr>
+        <p:spPr>
+          <a:xfrm>
+            <a:off x="1371600" y="4023360"/>
+            <a:ext cx="7086600" cy="792480"/>
+          </a:xfrm>
+          <a:prstGeom prst="rect">
+            <a:avLst/>
+          </a:prstGeom>
+        </p:spPr>
+        <p:txBody>
+          <a:bodyPr wrap="square" rtlCol="0">
+            <a:spAutoFit/>
+          </a:bodyPr>
+          <a:lstStyle/>
+          <a:p>
+            <a:r>
+              <a:rPr b="1" sz="2400">
+                <a:solidFill>
+                  <a:srgbClr val="172033"/>
+                </a:solidFill>
+                <a:latin typeface="Aptos"/>
+              </a:rPr>
+              <a:t>Custom agents</a:t>
+            </a:r>
+          </a:p>
+          <a:p>
+            <a:r>
+              <a:rPr b="1" sz="1600">
                 <a:solidFill>
                   <a:srgbClr val="1746D1"/>
                 </a:solidFill>
                 <a:latin typeface="Aptos"/>
               </a:rPr>
-              <a:t>06</a:t>
-            </a:r>
-          </a:p>
+              <a:t>code.visualstudio.com/docs/copilot/customization/custom-agents</a:t>
+            </a:r>
+          </a:p>
+        </p:txBody>
+      </p:sp>
+      <p:sp>
+        <p:nvSpPr>
+          <p:cNvPr id="13" name="TextBox 13"/>
+          <p:cNvSpPr txBox="1"/>
+          <p:nvPr/>
+        </p:nvSpPr>
+        <p:spPr>
+          <a:xfrm>
+            <a:off x="685800" y="2465832"/>
+            <a:ext cx="594360" cy="320040"/>
+          </a:xfrm>
+          <a:prstGeom prst="rect">
+            <a:avLst/>
+          </a:prstGeom>
+        </p:spPr>
+        <p:txBody>
+          <a:bodyPr wrap="square" rtlCol="0">
+            <a:spAutoFit/>
+          </a:bodyPr>
+          <a:lstStyle/>
+          <a:p>
+            <a:r>
+              <a:rPr b="1" sz="1700" spc="60">
+                <a:solidFill>
+                  <a:srgbClr val="1746D1"/>
+                </a:solidFill>
+                <a:latin typeface="Aptos"/>
+              </a:rPr>
+              <a:t>01</a:t>
+            </a:r>
+          </a:p>
+        </p:txBody>
+      </p:sp>
+      <p:sp>
+        <p:nvSpPr>
+          <p:cNvPr id="14" name="TextBox 14"/>
+          <p:cNvSpPr txBox="1"/>
+          <p:nvPr/>
+        </p:nvSpPr>
+        <p:spPr>
+          <a:xfrm>
+            <a:off x="685800" y="3288792"/>
+            <a:ext cx="594360" cy="320040"/>
+          </a:xfrm>
+          <a:prstGeom prst="rect">
+            <a:avLst/>
+          </a:prstGeom>
+        </p:spPr>
+        <p:txBody>
+          <a:bodyPr wrap="square" rtlCol="0">
+            <a:spAutoFit/>
+          </a:bodyPr>
+          <a:lstStyle/>
+          <a:p>
+            <a:r>
+              <a:rPr b="1" sz="1700" spc="60">
+                <a:solidFill>
+                  <a:srgbClr val="1746D1"/>
+                </a:solidFill>
+                <a:latin typeface="Aptos"/>
+              </a:rPr>
+              <a:t>02</a:t>
+            </a:r>
+          </a:p>
+        </p:txBody>
+      </p:sp>
+      <p:sp>
+        <p:nvSpPr>
+          <p:cNvPr id="15" name="TextBox 15"/>
+          <p:cNvSpPr txBox="1"/>
+          <p:nvPr/>
+        </p:nvSpPr>
+        <p:spPr>
+          <a:xfrm>
+            <a:off x="685800" y="4111752"/>
+            <a:ext cx="594360" cy="320040"/>
+          </a:xfrm>
+          <a:prstGeom prst="rect">
+            <a:avLst/>
+          </a:prstGeom>
+        </p:spPr>
+        <p:txBody>
+          <a:bodyPr wrap="square" rtlCol="0">
+            <a:spAutoFit/>
+          </a:bodyPr>
+          <a:lstStyle/>
+          <a:p>
+            <a:r>
+              <a:rPr b="1" sz="1700" spc="60">
+                <a:solidFill>
+                  <a:srgbClr val="1746D1"/>
+                </a:solidFill>
+                <a:latin typeface="Aptos"/>
+              </a:rPr>
+              <a:t>03</a:t>
+            </a:r>
+          </a:p>
+        </p:txBody>
+      </p:sp>
+      <p:sp>
+        <p:nvSpPr>
+          <p:cNvPr id="16" name="Shape 16"/>
+          <p:cNvSpPr/>
+          <p:nvPr/>
+        </p:nvSpPr>
+        <p:spPr>
+          <a:xfrm>
+            <a:off x="685800" y="3063240"/>
+            <a:ext cx="7772400" cy="12700"/>
+          </a:xfrm>
+          <a:prstGeom prst="rect">
+            <a:avLst/>
+          </a:prstGeom>
+          <a:solidFill>
+            <a:srgbClr val="CFD8E8"/>
+          </a:solidFill>
+          <a:ln>
+            <a:noFill/>
+          </a:ln>
+        </p:spPr>
+        <p:txBody>
+          <a:bodyPr rtlCol="0" anchor="ctr"/>
+          <a:lstStyle/>
+          <a:p/>
+        </p:txBody>
+      </p:sp>
+      <p:sp>
+        <p:nvSpPr>
+          <p:cNvPr id="17" name="Shape 17"/>
+          <p:cNvSpPr/>
+          <p:nvPr/>
+        </p:nvSpPr>
+        <p:spPr>
+          <a:xfrm>
+            <a:off x="685800" y="3886200"/>
+            <a:ext cx="7772400" cy="12700"/>
+          </a:xfrm>
+          <a:prstGeom prst="rect">
+            <a:avLst/>
+          </a:prstGeom>
+          <a:solidFill>
+            <a:srgbClr val="CFD8E8"/>
+          </a:solidFill>
+          <a:ln>
+            <a:noFill/>
+          </a:ln>
+        </p:spPr>
+        <p:txBody>
+          <a:bodyPr rtlCol="0" anchor="ctr"/>
+          <a:lstStyle/>
+          <a:p/>
+        </p:txBody>
+      </p:sp>
+      <p:sp>
+        <p:nvSpPr>
+          <p:cNvPr id="18" name="Shape 18"/>
+          <p:cNvSpPr/>
+          <p:nvPr/>
+        </p:nvSpPr>
+        <p:spPr>
+          <a:xfrm>
+            <a:off x="685800" y="2011680"/>
+            <a:ext cx="594360" cy="54864"/>
+          </a:xfrm>
+          <a:prstGeom prst="rect">
+            <a:avLst/>
+          </a:prstGeom>
+          <a:solidFill>
+            <a:srgbClr val="E45A3E"/>
+          </a:solidFill>
+          <a:ln>
+            <a:noFill/>
+          </a:ln>
+        </p:spPr>
+        <p:txBody>
+          <a:bodyPr rtlCol="0" anchor="ctr"/>
+          <a:lstStyle/>
+          <a:p/>
         </p:txBody>
       </p:sp>
     </p:spTree>
@@ -5531,23 +5799,23 @@
         </p:nvSpPr>
         <p:spPr>
           <a:xfrm>
-            <a:off x="960120" y="365760"/>
-            <a:ext cx="5486400" cy="274320"/>
-          </a:xfrm>
-          <a:prstGeom prst="rect">
-            <a:avLst/>
-          </a:prstGeom>
-        </p:spPr>
-        <p:txBody>
-          <a:bodyPr wrap="square" rtlCol="0">
-            <a:spAutoFit/>
-          </a:bodyPr>
-          <a:lstStyle/>
-          <a:p>
-            <a:r>
-              <a:rPr b="1" sz="1200" spc="120">
-                <a:solidFill>
-                  <a:srgbClr val="1746D1"/>
+            <a:off x="960120" y="347472"/>
+            <a:ext cx="6858000" cy="310896"/>
+          </a:xfrm>
+          <a:prstGeom prst="rect">
+            <a:avLst/>
+          </a:prstGeom>
+        </p:spPr>
+        <p:txBody>
+          <a:bodyPr wrap="square" rtlCol="0">
+            <a:spAutoFit/>
+          </a:bodyPr>
+          <a:lstStyle/>
+          <a:p>
+            <a:r>
+              <a:rPr b="1" sz="1500" spc="240">
+                <a:solidFill>
+                  <a:srgbClr val="C53F25"/>
                 </a:solidFill>
                 <a:latin typeface="Aptos"/>
               </a:rPr>
@@ -5564,27 +5832,27 @@
         </p:nvSpPr>
         <p:spPr>
           <a:xfrm>
-            <a:off x="685800" y="868680"/>
-            <a:ext cx="7772400" cy="1005840"/>
-          </a:xfrm>
-          <a:prstGeom prst="rect">
-            <a:avLst/>
-          </a:prstGeom>
-        </p:spPr>
-        <p:txBody>
-          <a:bodyPr wrap="square" rtlCol="0">
-            <a:spAutoFit/>
-          </a:bodyPr>
-          <a:lstStyle/>
-          <a:p>
-            <a:r>
-              <a:rPr b="1" sz="3400" spc="-80">
+            <a:off x="685800" y="754380"/>
+            <a:ext cx="7772400" cy="1188720"/>
+          </a:xfrm>
+          <a:prstGeom prst="rect">
+            <a:avLst/>
+          </a:prstGeom>
+        </p:spPr>
+        <p:txBody>
+          <a:bodyPr wrap="square" rtlCol="0">
+            <a:spAutoFit/>
+          </a:bodyPr>
+          <a:lstStyle/>
+          <a:p>
+            <a:r>
+              <a:rPr b="1" sz="4200" spc="-60">
                 <a:solidFill>
                   <a:srgbClr val="172033"/>
                 </a:solidFill>
                 <a:latin typeface="Aptos Display"/>
               </a:rPr>
-              <a:t>Copilot App lab: what we'll do</a:t>
+              <a:t>What we’ll do in the app</a:t>
             </a:r>
           </a:p>
         </p:txBody>
@@ -5597,49 +5865,49 @@
         </p:nvSpPr>
         <p:spPr>
           <a:xfrm>
-            <a:off x="685800" y="2103120"/>
-            <a:ext cx="7772400" cy="2377440"/>
-          </a:xfrm>
-          <a:prstGeom prst="rect">
-            <a:avLst/>
-          </a:prstGeom>
-        </p:spPr>
-        <p:txBody>
-          <a:bodyPr wrap="square" rtlCol="0">
-            <a:spAutoFit/>
-          </a:bodyPr>
-          <a:lstStyle/>
-          <a:p>
-            <a:r>
-              <a:rPr sz="2000">
+            <a:off x="1371600" y="2377440"/>
+            <a:ext cx="7086600" cy="792480"/>
+          </a:xfrm>
+          <a:prstGeom prst="rect">
+            <a:avLst/>
+          </a:prstGeom>
+        </p:spPr>
+        <p:txBody>
+          <a:bodyPr wrap="square" rtlCol="0">
+            <a:spAutoFit/>
+          </a:bodyPr>
+          <a:lstStyle/>
+          <a:p>
+            <a:r>
+              <a:rPr b="1" sz="2400">
+                <a:solidFill>
+                  <a:srgbClr val="172033"/>
+                </a:solidFill>
+                <a:latin typeface="Aptos"/>
+              </a:rPr>
+              <a:t>Install and orient</a:t>
+            </a:r>
+          </a:p>
+          <a:p>
+            <a:r>
+              <a:rPr sz="1700">
                 <a:solidFill>
                   <a:srgbClr val="455166"/>
                 </a:solidFill>
                 <a:latin typeface="Aptos"/>
               </a:rPr>
-              <a:t>Install and orient  ·  complete the guided app tour.</a:t>
-            </a:r>
-          </a:p>
-          <a:p>
-            <a:r>
-              <a:rPr sz="2000">
+              <a:t>Set up the app and walk the guided product tour.</a:t>
+            </a:r>
+          </a:p>
+          <a:p>
+            <a:r>
+              <a:rPr sz="600">
                 <a:solidFill>
                   <a:srgbClr val="455166"/>
                 </a:solidFill>
                 <a:latin typeface="Aptos"/>
               </a:rPr>
-              <a:t>Run Tailspin sessions  ·  add custom instructions  ·  use Plan and Autopilot.</a:t>
-            </a:r>
-          </a:p>
-          <a:p>
-            <a:r>
-              <a:rPr sz="2000">
-                <a:solidFill>
-                  <a:srgbClr val="455166"/>
-                </a:solidFill>
-                <a:latin typeface="Aptos"/>
-              </a:rPr>
-              <a:t>Test with Playwright MCP  ·  land with Agent Merge  ·  plan on canvases.</a:t>
+              <a:t xml:space="preserve"> </a:t>
             </a:r>
           </a:p>
         </p:txBody>
@@ -5659,7 +5927,7 @@
             <a:avLst/>
           </a:prstGeom>
           <a:solidFill>
-            <a:srgbClr val="E8F0FF"/>
+            <a:srgbClr val="FFF3EF"/>
           </a:solidFill>
         </p:spPr>
         <p:txBody>
@@ -5667,13 +5935,13 @@
           <a:lstStyle/>
           <a:p>
             <a:r>
-              <a:rPr b="1" sz="1600">
-                <a:solidFill>
-                  <a:srgbClr val="1746D1"/>
-                </a:solidFill>
-                <a:latin typeface="Aptos"/>
-              </a:rPr>
-              <a:t>DELIVER  ·  Move from issue to reviewed, tested, and merged change.</a:t>
+              <a:rPr b="1" sz="1900">
+                <a:solidFill>
+                  <a:srgbClr val="C53F25"/>
+                </a:solidFill>
+                <a:latin typeface="Aptos"/>
+              </a:rPr>
+              <a:t>DELIVER  ·  From issue to reviewed, tested, merged change.</a:t>
             </a:r>
           </a:p>
         </p:txBody>
@@ -5686,21 +5954,21 @@
         </p:nvSpPr>
         <p:spPr>
           <a:xfrm>
-            <a:off x="685800" y="6355080"/>
-            <a:ext cx="6858000" cy="274320"/>
-          </a:xfrm>
-          <a:prstGeom prst="rect">
-            <a:avLst/>
-          </a:prstGeom>
-        </p:spPr>
-        <p:txBody>
-          <a:bodyPr wrap="square" rtlCol="0">
-            <a:spAutoFit/>
-          </a:bodyPr>
-          <a:lstStyle/>
-          <a:p>
-            <a:r>
-              <a:rPr b="1" sz="1000" spc="80">
+            <a:off x="685800" y="6300216"/>
+            <a:ext cx="6858000" cy="320040"/>
+          </a:xfrm>
+          <a:prstGeom prst="rect">
+            <a:avLst/>
+          </a:prstGeom>
+        </p:spPr>
+        <p:txBody>
+          <a:bodyPr wrap="square" rtlCol="0">
+            <a:spAutoFit/>
+          </a:bodyPr>
+          <a:lstStyle/>
+          <a:p>
+            <a:r>
+              <a:rPr b="1" sz="1200" spc="120">
                 <a:solidFill>
                   <a:srgbClr val="7A8497"/>
                 </a:solidFill>
@@ -5719,29 +5987,297 @@
         </p:nvSpPr>
         <p:spPr>
           <a:xfrm>
-            <a:off x="8230000" y="6355080"/>
-            <a:ext cx="457200" cy="274320"/>
-          </a:xfrm>
-          <a:prstGeom prst="rect">
-            <a:avLst/>
-          </a:prstGeom>
-        </p:spPr>
-        <p:txBody>
-          <a:bodyPr wrap="square" rtlCol="0">
-            <a:spAutoFit/>
-          </a:bodyPr>
-          <a:lstStyle/>
-          <a:p>
-            <a:r>
-              <a:rPr b="1" sz="1000">
-                <a:solidFill>
-                  <a:srgbClr val="1746D1"/>
+            <a:off x="8046720" y="6300216"/>
+            <a:ext cx="640080" cy="320040"/>
+          </a:xfrm>
+          <a:prstGeom prst="rect">
+            <a:avLst/>
+          </a:prstGeom>
+        </p:spPr>
+        <p:txBody>
+          <a:bodyPr wrap="square" rtlCol="0">
+            <a:spAutoFit/>
+          </a:bodyPr>
+          <a:lstStyle/>
+          <a:p>
+            <a:r>
+              <a:rPr b="1" sz="1300">
+                <a:solidFill>
+                  <a:srgbClr val="C53F25"/>
                 </a:solidFill>
                 <a:latin typeface="Aptos"/>
               </a:rPr>
               <a:t>07</a:t>
             </a:r>
           </a:p>
+        </p:txBody>
+      </p:sp>
+      <p:sp>
+        <p:nvSpPr>
+          <p:cNvPr id="11" name="TextBox 11"/>
+          <p:cNvSpPr txBox="1"/>
+          <p:nvPr/>
+        </p:nvSpPr>
+        <p:spPr>
+          <a:xfrm>
+            <a:off x="1371600" y="3200400"/>
+            <a:ext cx="7086600" cy="792480"/>
+          </a:xfrm>
+          <a:prstGeom prst="rect">
+            <a:avLst/>
+          </a:prstGeom>
+        </p:spPr>
+        <p:txBody>
+          <a:bodyPr wrap="square" rtlCol="0">
+            <a:spAutoFit/>
+          </a:bodyPr>
+          <a:lstStyle/>
+          <a:p>
+            <a:r>
+              <a:rPr b="1" sz="2400">
+                <a:solidFill>
+                  <a:srgbClr val="172033"/>
+                </a:solidFill>
+                <a:latin typeface="Aptos"/>
+              </a:rPr>
+              <a:t>Run real agent sessions</a:t>
+            </a:r>
+          </a:p>
+          <a:p>
+            <a:r>
+              <a:rPr sz="1700">
+                <a:solidFill>
+                  <a:srgbClr val="455166"/>
+                </a:solidFill>
+                <a:latin typeface="Aptos"/>
+              </a:rPr>
+              <a:t>Custom instructions, Plan mode, and Autopilot on Tailspin.</a:t>
+            </a:r>
+          </a:p>
+        </p:txBody>
+      </p:sp>
+      <p:sp>
+        <p:nvSpPr>
+          <p:cNvPr id="12" name="TextBox 12"/>
+          <p:cNvSpPr txBox="1"/>
+          <p:nvPr/>
+        </p:nvSpPr>
+        <p:spPr>
+          <a:xfrm>
+            <a:off x="1371600" y="4023360"/>
+            <a:ext cx="7086600" cy="792480"/>
+          </a:xfrm>
+          <a:prstGeom prst="rect">
+            <a:avLst/>
+          </a:prstGeom>
+        </p:spPr>
+        <p:txBody>
+          <a:bodyPr wrap="square" rtlCol="0">
+            <a:spAutoFit/>
+          </a:bodyPr>
+          <a:lstStyle/>
+          <a:p>
+            <a:r>
+              <a:rPr b="1" sz="2400">
+                <a:solidFill>
+                  <a:srgbClr val="172033"/>
+                </a:solidFill>
+                <a:latin typeface="Aptos"/>
+              </a:rPr>
+              <a:t>Test, review, and merge</a:t>
+            </a:r>
+          </a:p>
+          <a:p>
+            <a:r>
+              <a:rPr sz="1700">
+                <a:solidFill>
+                  <a:srgbClr val="455166"/>
+                </a:solidFill>
+                <a:latin typeface="Aptos"/>
+              </a:rPr>
+              <a:t>Playwright MCP, Agent Merge, and planning on canvases.</a:t>
+            </a:r>
+          </a:p>
+        </p:txBody>
+      </p:sp>
+      <p:sp>
+        <p:nvSpPr>
+          <p:cNvPr id="13" name="TextBox 13"/>
+          <p:cNvSpPr txBox="1"/>
+          <p:nvPr/>
+        </p:nvSpPr>
+        <p:spPr>
+          <a:xfrm>
+            <a:off x="685800" y="2465832"/>
+            <a:ext cx="594360" cy="320040"/>
+          </a:xfrm>
+          <a:prstGeom prst="rect">
+            <a:avLst/>
+          </a:prstGeom>
+        </p:spPr>
+        <p:txBody>
+          <a:bodyPr wrap="square" rtlCol="0">
+            <a:spAutoFit/>
+          </a:bodyPr>
+          <a:lstStyle/>
+          <a:p>
+            <a:r>
+              <a:rPr b="1" sz="1700" spc="60">
+                <a:solidFill>
+                  <a:srgbClr val="C53F25"/>
+                </a:solidFill>
+                <a:latin typeface="Aptos"/>
+              </a:rPr>
+              <a:t>01</a:t>
+            </a:r>
+          </a:p>
+        </p:txBody>
+      </p:sp>
+      <p:sp>
+        <p:nvSpPr>
+          <p:cNvPr id="14" name="TextBox 14"/>
+          <p:cNvSpPr txBox="1"/>
+          <p:nvPr/>
+        </p:nvSpPr>
+        <p:spPr>
+          <a:xfrm>
+            <a:off x="685800" y="3288792"/>
+            <a:ext cx="594360" cy="320040"/>
+          </a:xfrm>
+          <a:prstGeom prst="rect">
+            <a:avLst/>
+          </a:prstGeom>
+        </p:spPr>
+        <p:txBody>
+          <a:bodyPr wrap="square" rtlCol="0">
+            <a:spAutoFit/>
+          </a:bodyPr>
+          <a:lstStyle/>
+          <a:p>
+            <a:r>
+              <a:rPr b="1" sz="1700" spc="60">
+                <a:solidFill>
+                  <a:srgbClr val="C53F25"/>
+                </a:solidFill>
+                <a:latin typeface="Aptos"/>
+              </a:rPr>
+              <a:t>02</a:t>
+            </a:r>
+          </a:p>
+        </p:txBody>
+      </p:sp>
+      <p:sp>
+        <p:nvSpPr>
+          <p:cNvPr id="15" name="TextBox 15"/>
+          <p:cNvSpPr txBox="1"/>
+          <p:nvPr/>
+        </p:nvSpPr>
+        <p:spPr>
+          <a:xfrm>
+            <a:off x="685800" y="4111752"/>
+            <a:ext cx="594360" cy="320040"/>
+          </a:xfrm>
+          <a:prstGeom prst="rect">
+            <a:avLst/>
+          </a:prstGeom>
+        </p:spPr>
+        <p:txBody>
+          <a:bodyPr wrap="square" rtlCol="0">
+            <a:spAutoFit/>
+          </a:bodyPr>
+          <a:lstStyle/>
+          <a:p>
+            <a:r>
+              <a:rPr b="1" sz="1700" spc="60">
+                <a:solidFill>
+                  <a:srgbClr val="C53F25"/>
+                </a:solidFill>
+                <a:latin typeface="Aptos"/>
+              </a:rPr>
+              <a:t>03</a:t>
+            </a:r>
+          </a:p>
+        </p:txBody>
+      </p:sp>
+      <p:sp>
+        <p:nvSpPr>
+          <p:cNvPr id="16" name="Shape 16"/>
+          <p:cNvSpPr/>
+          <p:nvPr/>
+        </p:nvSpPr>
+        <p:spPr>
+          <a:xfrm>
+            <a:off x="685800" y="3063240"/>
+            <a:ext cx="7772400" cy="12700"/>
+          </a:xfrm>
+          <a:prstGeom prst="rect">
+            <a:avLst/>
+          </a:prstGeom>
+          <a:solidFill>
+            <a:srgbClr val="F0D7CF"/>
+          </a:solidFill>
+          <a:ln>
+            <a:noFill/>
+          </a:ln>
+        </p:spPr>
+        <p:txBody>
+          <a:bodyPr rtlCol="0" anchor="ctr"/>
+          <a:lstStyle/>
+          <a:p/>
+        </p:txBody>
+      </p:sp>
+      <p:sp>
+        <p:nvSpPr>
+          <p:cNvPr id="17" name="Shape 17"/>
+          <p:cNvSpPr/>
+          <p:nvPr/>
+        </p:nvSpPr>
+        <p:spPr>
+          <a:xfrm>
+            <a:off x="685800" y="3886200"/>
+            <a:ext cx="7772400" cy="12700"/>
+          </a:xfrm>
+          <a:prstGeom prst="rect">
+            <a:avLst/>
+          </a:prstGeom>
+          <a:solidFill>
+            <a:srgbClr val="F0D7CF"/>
+          </a:solidFill>
+          <a:ln>
+            <a:noFill/>
+          </a:ln>
+        </p:spPr>
+        <p:txBody>
+          <a:bodyPr rtlCol="0" anchor="ctr"/>
+          <a:lstStyle/>
+          <a:p/>
+        </p:txBody>
+      </p:sp>
+      <p:sp>
+        <p:nvSpPr>
+          <p:cNvPr id="18" name="Shape 18"/>
+          <p:cNvSpPr/>
+          <p:nvPr/>
+        </p:nvSpPr>
+        <p:spPr>
+          <a:xfrm>
+            <a:off x="685800" y="2011680"/>
+            <a:ext cx="594360" cy="54864"/>
+          </a:xfrm>
+          <a:prstGeom prst="rect">
+            <a:avLst/>
+          </a:prstGeom>
+          <a:solidFill>
+            <a:srgbClr val="E45A3E"/>
+          </a:solidFill>
+          <a:ln>
+            <a:noFill/>
+          </a:ln>
+        </p:spPr>
+        <p:txBody>
+          <a:bodyPr rtlCol="0" anchor="ctr"/>
+          <a:lstStyle/>
+          <a:p/>
         </p:txBody>
       </p:sp>
     </p:spTree>
@@ -7086,21 +7622,21 @@
         </p:nvSpPr>
         <p:spPr>
           <a:xfrm>
-            <a:off x="960120" y="365760"/>
-            <a:ext cx="5486400" cy="274320"/>
-          </a:xfrm>
-          <a:prstGeom prst="rect">
-            <a:avLst/>
-          </a:prstGeom>
-        </p:spPr>
-        <p:txBody>
-          <a:bodyPr wrap="square" rtlCol="0">
-            <a:spAutoFit/>
-          </a:bodyPr>
-          <a:lstStyle/>
-          <a:p>
-            <a:r>
-              <a:rPr b="1" sz="1200" spc="120">
+            <a:off x="960120" y="347472"/>
+            <a:ext cx="6858000" cy="310896"/>
+          </a:xfrm>
+          <a:prstGeom prst="rect">
+            <a:avLst/>
+          </a:prstGeom>
+        </p:spPr>
+        <p:txBody>
+          <a:bodyPr wrap="square" rtlCol="0">
+            <a:spAutoFit/>
+          </a:bodyPr>
+          <a:lstStyle/>
+          <a:p>
+            <a:r>
+              <a:rPr b="1" sz="1500" spc="240">
                 <a:solidFill>
                   <a:srgbClr val="1746D1"/>
                 </a:solidFill>
@@ -7119,21 +7655,21 @@
         </p:nvSpPr>
         <p:spPr>
           <a:xfrm>
-            <a:off x="685800" y="868680"/>
-            <a:ext cx="7772400" cy="1005840"/>
-          </a:xfrm>
-          <a:prstGeom prst="rect">
-            <a:avLst/>
-          </a:prstGeom>
-        </p:spPr>
-        <p:txBody>
-          <a:bodyPr wrap="square" rtlCol="0">
-            <a:spAutoFit/>
-          </a:bodyPr>
-          <a:lstStyle/>
-          <a:p>
-            <a:r>
-              <a:rPr b="1" sz="3400" spc="-80">
+            <a:off x="685800" y="754380"/>
+            <a:ext cx="7772400" cy="1188720"/>
+          </a:xfrm>
+          <a:prstGeom prst="rect">
+            <a:avLst/>
+          </a:prstGeom>
+        </p:spPr>
+        <p:txBody>
+          <a:bodyPr wrap="square" rtlCol="0">
+            <a:spAutoFit/>
+          </a:bodyPr>
+          <a:lstStyle/>
+          <a:p>
+            <a:r>
+              <a:rPr b="1" sz="4200" spc="-60">
                 <a:solidFill>
                   <a:srgbClr val="172033"/>
                 </a:solidFill>
@@ -7152,49 +7688,49 @@
         </p:nvSpPr>
         <p:spPr>
           <a:xfrm>
-            <a:off x="685800" y="2103120"/>
-            <a:ext cx="7772400" cy="2377440"/>
-          </a:xfrm>
-          <a:prstGeom prst="rect">
-            <a:avLst/>
-          </a:prstGeom>
-        </p:spPr>
-        <p:txBody>
-          <a:bodyPr wrap="square" rtlCol="0">
-            <a:spAutoFit/>
-          </a:bodyPr>
-          <a:lstStyle/>
-          <a:p>
-            <a:r>
-              <a:rPr sz="2000">
+            <a:off x="1371600" y="2377440"/>
+            <a:ext cx="7086600" cy="792480"/>
+          </a:xfrm>
+          <a:prstGeom prst="rect">
+            <a:avLst/>
+          </a:prstGeom>
+        </p:spPr>
+        <p:txBody>
+          <a:bodyPr wrap="square" rtlCol="0">
+            <a:spAutoFit/>
+          </a:bodyPr>
+          <a:lstStyle/>
+          <a:p>
+            <a:r>
+              <a:rPr b="1" sz="2400">
+                <a:solidFill>
+                  <a:srgbClr val="172033"/>
+                </a:solidFill>
+                <a:latin typeface="Aptos"/>
+              </a:rPr>
+              <a:t>VS Code — agents in your editor</a:t>
+            </a:r>
+          </a:p>
+          <a:p>
+            <a:r>
+              <a:rPr sz="1700">
                 <a:solidFill>
                   <a:srgbClr val="455166"/>
                 </a:solidFill>
                 <a:latin typeface="Aptos"/>
               </a:rPr>
-              <a:t>01  VS Code — build with local agents, skills, hooks, and browser tools.</a:t>
-            </a:r>
-          </a:p>
-          <a:p>
-            <a:r>
-              <a:rPr sz="2000">
+              <a:t>Skills, hooks, browser tools, and Plan mode.</a:t>
+            </a:r>
+          </a:p>
+          <a:p>
+            <a:r>
+              <a:rPr sz="600">
                 <a:solidFill>
                   <a:srgbClr val="455166"/>
                 </a:solidFill>
                 <a:latin typeface="Aptos"/>
               </a:rPr>
-              <a:t>02  Copilot App — move from issue to implementation, review, testing, and merge.</a:t>
-            </a:r>
-          </a:p>
-          <a:p>
-            <a:r>
-              <a:rPr sz="2000">
-                <a:solidFill>
-                  <a:srgbClr val="455166"/>
-                </a:solidFill>
-                <a:latin typeface="Aptos"/>
-              </a:rPr>
-              <a:t>Keep the workshop site open as your shared route map.</a:t>
+              <a:t xml:space="preserve"> </a:t>
             </a:r>
           </a:p>
         </p:txBody>
@@ -7222,13 +7758,13 @@
           <a:lstStyle/>
           <a:p>
             <a:r>
-              <a:rPr b="1" sz="1600">
+              <a:rPr b="1" sz="1900">
                 <a:solidFill>
                   <a:srgbClr val="1746D1"/>
                 </a:solidFill>
                 <a:latin typeface="Aptos"/>
               </a:rPr>
-              <a:t>OUTCOME  ·  Complete two practical, repo-backed development loops.</a:t>
+              <a:t>OUTCOME  ·  Two practical, repo-backed development loops.</a:t>
             </a:r>
           </a:p>
         </p:txBody>
@@ -7241,21 +7777,21 @@
         </p:nvSpPr>
         <p:spPr>
           <a:xfrm>
-            <a:off x="685800" y="6355080"/>
-            <a:ext cx="6858000" cy="274320"/>
-          </a:xfrm>
-          <a:prstGeom prst="rect">
-            <a:avLst/>
-          </a:prstGeom>
-        </p:spPr>
-        <p:txBody>
-          <a:bodyPr wrap="square" rtlCol="0">
-            <a:spAutoFit/>
-          </a:bodyPr>
-          <a:lstStyle/>
-          <a:p>
-            <a:r>
-              <a:rPr b="1" sz="1000" spc="80">
+            <a:off x="685800" y="6300216"/>
+            <a:ext cx="6858000" cy="320040"/>
+          </a:xfrm>
+          <a:prstGeom prst="rect">
+            <a:avLst/>
+          </a:prstGeom>
+        </p:spPr>
+        <p:txBody>
+          <a:bodyPr wrap="square" rtlCol="0">
+            <a:spAutoFit/>
+          </a:bodyPr>
+          <a:lstStyle/>
+          <a:p>
+            <a:r>
+              <a:rPr b="1" sz="1200" spc="120">
                 <a:solidFill>
                   <a:srgbClr val="7A8497"/>
                 </a:solidFill>
@@ -7274,21 +7810,21 @@
         </p:nvSpPr>
         <p:spPr>
           <a:xfrm>
-            <a:off x="8230000" y="6355080"/>
-            <a:ext cx="457200" cy="274320"/>
-          </a:xfrm>
-          <a:prstGeom prst="rect">
-            <a:avLst/>
-          </a:prstGeom>
-        </p:spPr>
-        <p:txBody>
-          <a:bodyPr wrap="square" rtlCol="0">
-            <a:spAutoFit/>
-          </a:bodyPr>
-          <a:lstStyle/>
-          <a:p>
-            <a:r>
-              <a:rPr b="1" sz="1000">
+            <a:off x="8046720" y="6300216"/>
+            <a:ext cx="640080" cy="320040"/>
+          </a:xfrm>
+          <a:prstGeom prst="rect">
+            <a:avLst/>
+          </a:prstGeom>
+        </p:spPr>
+        <p:txBody>
+          <a:bodyPr wrap="square" rtlCol="0">
+            <a:spAutoFit/>
+          </a:bodyPr>
+          <a:lstStyle/>
+          <a:p>
+            <a:r>
+              <a:rPr b="1" sz="1300">
                 <a:solidFill>
                   <a:srgbClr val="1746D1"/>
                 </a:solidFill>
@@ -7297,6 +7833,274 @@
               <a:t>02</a:t>
             </a:r>
           </a:p>
+        </p:txBody>
+      </p:sp>
+      <p:sp>
+        <p:nvSpPr>
+          <p:cNvPr id="11" name="TextBox 11"/>
+          <p:cNvSpPr txBox="1"/>
+          <p:nvPr/>
+        </p:nvSpPr>
+        <p:spPr>
+          <a:xfrm>
+            <a:off x="1371600" y="3200400"/>
+            <a:ext cx="7086600" cy="792480"/>
+          </a:xfrm>
+          <a:prstGeom prst="rect">
+            <a:avLst/>
+          </a:prstGeom>
+        </p:spPr>
+        <p:txBody>
+          <a:bodyPr wrap="square" rtlCol="0">
+            <a:spAutoFit/>
+          </a:bodyPr>
+          <a:lstStyle/>
+          <a:p>
+            <a:r>
+              <a:rPr b="1" sz="2400">
+                <a:solidFill>
+                  <a:srgbClr val="172033"/>
+                </a:solidFill>
+                <a:latin typeface="Aptos"/>
+              </a:rPr>
+              <a:t>Copilot app — issue to merge</a:t>
+            </a:r>
+          </a:p>
+          <a:p>
+            <a:r>
+              <a:rPr sz="1700">
+                <a:solidFill>
+                  <a:srgbClr val="455166"/>
+                </a:solidFill>
+                <a:latin typeface="Aptos"/>
+              </a:rPr>
+              <a:t>Sessions, Plan, Autopilot, MCP testing, and Agent Merge.</a:t>
+            </a:r>
+          </a:p>
+        </p:txBody>
+      </p:sp>
+      <p:sp>
+        <p:nvSpPr>
+          <p:cNvPr id="12" name="TextBox 12"/>
+          <p:cNvSpPr txBox="1"/>
+          <p:nvPr/>
+        </p:nvSpPr>
+        <p:spPr>
+          <a:xfrm>
+            <a:off x="1371600" y="4023360"/>
+            <a:ext cx="7086600" cy="792480"/>
+          </a:xfrm>
+          <a:prstGeom prst="rect">
+            <a:avLst/>
+          </a:prstGeom>
+        </p:spPr>
+        <p:txBody>
+          <a:bodyPr wrap="square" rtlCol="0">
+            <a:spAutoFit/>
+          </a:bodyPr>
+          <a:lstStyle/>
+          <a:p>
+            <a:r>
+              <a:rPr b="1" sz="2400">
+                <a:solidFill>
+                  <a:srgbClr val="172033"/>
+                </a:solidFill>
+                <a:latin typeface="Aptos"/>
+              </a:rPr>
+              <a:t>One shared route map</a:t>
+            </a:r>
+          </a:p>
+          <a:p>
+            <a:r>
+              <a:rPr sz="1700">
+                <a:solidFill>
+                  <a:srgbClr val="455166"/>
+                </a:solidFill>
+                <a:latin typeface="Aptos"/>
+              </a:rPr>
+              <a:t>Keep the site open; progress saves in your browser.</a:t>
+            </a:r>
+          </a:p>
+        </p:txBody>
+      </p:sp>
+      <p:sp>
+        <p:nvSpPr>
+          <p:cNvPr id="13" name="TextBox 13"/>
+          <p:cNvSpPr txBox="1"/>
+          <p:nvPr/>
+        </p:nvSpPr>
+        <p:spPr>
+          <a:xfrm>
+            <a:off x="685800" y="2465832"/>
+            <a:ext cx="594360" cy="320040"/>
+          </a:xfrm>
+          <a:prstGeom prst="rect">
+            <a:avLst/>
+          </a:prstGeom>
+        </p:spPr>
+        <p:txBody>
+          <a:bodyPr wrap="square" rtlCol="0">
+            <a:spAutoFit/>
+          </a:bodyPr>
+          <a:lstStyle/>
+          <a:p>
+            <a:r>
+              <a:rPr b="1" sz="1700" spc="60">
+                <a:solidFill>
+                  <a:srgbClr val="1746D1"/>
+                </a:solidFill>
+                <a:latin typeface="Aptos"/>
+              </a:rPr>
+              <a:t>01</a:t>
+            </a:r>
+          </a:p>
+        </p:txBody>
+      </p:sp>
+      <p:sp>
+        <p:nvSpPr>
+          <p:cNvPr id="14" name="TextBox 14"/>
+          <p:cNvSpPr txBox="1"/>
+          <p:nvPr/>
+        </p:nvSpPr>
+        <p:spPr>
+          <a:xfrm>
+            <a:off x="685800" y="3288792"/>
+            <a:ext cx="594360" cy="320040"/>
+          </a:xfrm>
+          <a:prstGeom prst="rect">
+            <a:avLst/>
+          </a:prstGeom>
+        </p:spPr>
+        <p:txBody>
+          <a:bodyPr wrap="square" rtlCol="0">
+            <a:spAutoFit/>
+          </a:bodyPr>
+          <a:lstStyle/>
+          <a:p>
+            <a:r>
+              <a:rPr b="1" sz="1700" spc="60">
+                <a:solidFill>
+                  <a:srgbClr val="1746D1"/>
+                </a:solidFill>
+                <a:latin typeface="Aptos"/>
+              </a:rPr>
+              <a:t>02</a:t>
+            </a:r>
+          </a:p>
+        </p:txBody>
+      </p:sp>
+      <p:sp>
+        <p:nvSpPr>
+          <p:cNvPr id="15" name="TextBox 15"/>
+          <p:cNvSpPr txBox="1"/>
+          <p:nvPr/>
+        </p:nvSpPr>
+        <p:spPr>
+          <a:xfrm>
+            <a:off x="685800" y="4111752"/>
+            <a:ext cx="594360" cy="320040"/>
+          </a:xfrm>
+          <a:prstGeom prst="rect">
+            <a:avLst/>
+          </a:prstGeom>
+        </p:spPr>
+        <p:txBody>
+          <a:bodyPr wrap="square" rtlCol="0">
+            <a:spAutoFit/>
+          </a:bodyPr>
+          <a:lstStyle/>
+          <a:p>
+            <a:r>
+              <a:rPr b="1" sz="1700" spc="60">
+                <a:solidFill>
+                  <a:srgbClr val="1746D1"/>
+                </a:solidFill>
+                <a:latin typeface="Aptos"/>
+              </a:rPr>
+              <a:t>03</a:t>
+            </a:r>
+          </a:p>
+        </p:txBody>
+      </p:sp>
+      <p:sp>
+        <p:nvSpPr>
+          <p:cNvPr id="16" name="Shape 16"/>
+          <p:cNvSpPr/>
+          <p:nvPr/>
+        </p:nvSpPr>
+        <p:spPr>
+          <a:xfrm>
+            <a:off x="685800" y="3063240"/>
+            <a:ext cx="7772400" cy="12700"/>
+          </a:xfrm>
+          <a:prstGeom prst="rect">
+            <a:avLst/>
+          </a:prstGeom>
+          <a:solidFill>
+            <a:srgbClr val="CFD8E8"/>
+          </a:solidFill>
+          <a:ln>
+            <a:noFill/>
+          </a:ln>
+        </p:spPr>
+        <p:txBody>
+          <a:bodyPr rtlCol="0" anchor="ctr"/>
+          <a:lstStyle/>
+          <a:p/>
+        </p:txBody>
+      </p:sp>
+      <p:sp>
+        <p:nvSpPr>
+          <p:cNvPr id="17" name="Shape 17"/>
+          <p:cNvSpPr/>
+          <p:nvPr/>
+        </p:nvSpPr>
+        <p:spPr>
+          <a:xfrm>
+            <a:off x="685800" y="3886200"/>
+            <a:ext cx="7772400" cy="12700"/>
+          </a:xfrm>
+          <a:prstGeom prst="rect">
+            <a:avLst/>
+          </a:prstGeom>
+          <a:solidFill>
+            <a:srgbClr val="CFD8E8"/>
+          </a:solidFill>
+          <a:ln>
+            <a:noFill/>
+          </a:ln>
+        </p:spPr>
+        <p:txBody>
+          <a:bodyPr rtlCol="0" anchor="ctr"/>
+          <a:lstStyle/>
+          <a:p/>
+        </p:txBody>
+      </p:sp>
+      <p:sp>
+        <p:nvSpPr>
+          <p:cNvPr id="18" name="Shape 18"/>
+          <p:cNvSpPr/>
+          <p:nvPr/>
+        </p:nvSpPr>
+        <p:spPr>
+          <a:xfrm>
+            <a:off x="685800" y="2011680"/>
+            <a:ext cx="594360" cy="54864"/>
+          </a:xfrm>
+          <a:prstGeom prst="rect">
+            <a:avLst/>
+          </a:prstGeom>
+          <a:solidFill>
+            <a:srgbClr val="E45A3E"/>
+          </a:solidFill>
+          <a:ln>
+            <a:noFill/>
+          </a:ln>
+        </p:spPr>
+        <p:txBody>
+          <a:bodyPr rtlCol="0" anchor="ctr"/>
+          <a:lstStyle/>
+          <a:p/>
         </p:txBody>
       </p:sp>
     </p:spTree>
@@ -8330,115 +9134,115 @@
         </p:nvSpPr>
         <p:spPr>
           <a:xfrm>
-            <a:off x="960120" y="365760"/>
-            <a:ext cx="5486400" cy="274320"/>
-          </a:xfrm>
-          <a:prstGeom prst="rect">
-            <a:avLst/>
-          </a:prstGeom>
-        </p:spPr>
-        <p:txBody>
-          <a:bodyPr wrap="square" rtlCol="0">
-            <a:spAutoFit/>
-          </a:bodyPr>
-          <a:lstStyle/>
-          <a:p>
-            <a:r>
-              <a:rPr b="1" sz="1200" spc="120">
+            <a:off x="960120" y="347472"/>
+            <a:ext cx="6858000" cy="310896"/>
+          </a:xfrm>
+          <a:prstGeom prst="rect">
+            <a:avLst/>
+          </a:prstGeom>
+        </p:spPr>
+        <p:txBody>
+          <a:bodyPr wrap="square" rtlCol="0">
+            <a:spAutoFit/>
+          </a:bodyPr>
+          <a:lstStyle/>
+          <a:p>
+            <a:r>
+              <a:rPr b="1" sz="1500" spc="240">
+                <a:solidFill>
+                  <a:srgbClr val="C53F25"/>
+                </a:solidFill>
+                <a:latin typeface="Aptos"/>
+              </a:rPr>
+              <a:t>COPILOT APP  /  DOCUMENTATION</a:t>
+            </a:r>
+          </a:p>
+        </p:txBody>
+      </p:sp>
+      <p:sp>
+        <p:nvSpPr>
+          <p:cNvPr id="6" name="TextBox 6"/>
+          <p:cNvSpPr txBox="1"/>
+          <p:nvPr/>
+        </p:nvSpPr>
+        <p:spPr>
+          <a:xfrm>
+            <a:off x="685800" y="754380"/>
+            <a:ext cx="7772400" cy="1188720"/>
+          </a:xfrm>
+          <a:prstGeom prst="rect">
+            <a:avLst/>
+          </a:prstGeom>
+        </p:spPr>
+        <p:txBody>
+          <a:bodyPr wrap="square" rtlCol="0">
+            <a:spAutoFit/>
+          </a:bodyPr>
+          <a:lstStyle/>
+          <a:p>
+            <a:r>
+              <a:rPr b="1" sz="4200" spc="-60">
+                <a:solidFill>
+                  <a:srgbClr val="172033"/>
+                </a:solidFill>
+                <a:latin typeface="Aptos Display"/>
+              </a:rPr>
+              <a:t>Keep exploring the Copilot app.</a:t>
+            </a:r>
+          </a:p>
+        </p:txBody>
+      </p:sp>
+      <p:sp>
+        <p:nvSpPr>
+          <p:cNvPr id="7" name="TextBox 7"/>
+          <p:cNvSpPr txBox="1"/>
+          <p:nvPr/>
+        </p:nvSpPr>
+        <p:spPr>
+          <a:xfrm>
+            <a:off x="1371600" y="2377440"/>
+            <a:ext cx="7086600" cy="792480"/>
+          </a:xfrm>
+          <a:prstGeom prst="rect">
+            <a:avLst/>
+          </a:prstGeom>
+        </p:spPr>
+        <p:txBody>
+          <a:bodyPr wrap="square" rtlCol="0">
+            <a:spAutoFit/>
+          </a:bodyPr>
+          <a:lstStyle/>
+          <a:p>
+            <a:r>
+              <a:rPr b="1" sz="2400">
+                <a:solidFill>
+                  <a:srgbClr val="172033"/>
+                </a:solidFill>
+                <a:latin typeface="Aptos"/>
+              </a:rPr>
+              <a:t>Copilot app overview</a:t>
+            </a:r>
+          </a:p>
+          <a:p>
+            <a:r>
+              <a:rPr b="1" sz="1600">
+                <a:solidFill>
+                  <a:srgbClr val="C53F25"/>
+                </a:solidFill>
+                <a:latin typeface="Aptos"/>
+              </a:rPr>
+              <a:t>docs.github.com/copilot/how-tos/github-copilot-app</a:t>
+            </a:r>
+          </a:p>
+          <a:p>
+            <a:r>
+              <a:rPr b="1" sz="600">
                 <a:solidFill>
                   <a:srgbClr val="1746D1"/>
                 </a:solidFill>
                 <a:latin typeface="Aptos"/>
               </a:rPr>
-              <a:t>COPILOT APP  /  DOCUMENTATION</a:t>
-            </a:r>
-          </a:p>
-        </p:txBody>
-      </p:sp>
-      <p:sp>
-        <p:nvSpPr>
-          <p:cNvPr id="6" name="TextBox 6"/>
-          <p:cNvSpPr txBox="1"/>
-          <p:nvPr/>
-        </p:nvSpPr>
-        <p:spPr>
-          <a:xfrm>
-            <a:off x="685800" y="868680"/>
-            <a:ext cx="7772400" cy="1005840"/>
-          </a:xfrm>
-          <a:prstGeom prst="rect">
-            <a:avLst/>
-          </a:prstGeom>
-        </p:spPr>
-        <p:txBody>
-          <a:bodyPr wrap="square" rtlCol="0">
-            <a:spAutoFit/>
-          </a:bodyPr>
-          <a:lstStyle/>
-          <a:p>
-            <a:r>
-              <a:rPr b="1" sz="3400" spc="-80">
-                <a:solidFill>
-                  <a:srgbClr val="172033"/>
-                </a:solidFill>
-                <a:latin typeface="Aptos Display"/>
-              </a:rPr>
-              <a:t>Keep exploring the Copilot app.</a:t>
-            </a:r>
-          </a:p>
-        </p:txBody>
-      </p:sp>
-      <p:sp>
-        <p:nvSpPr>
-          <p:cNvPr id="7" name="TextBox 7"/>
-          <p:cNvSpPr txBox="1"/>
-          <p:nvPr/>
-        </p:nvSpPr>
-        <p:spPr>
-          <a:xfrm>
-            <a:off x="685800" y="2103120"/>
-            <a:ext cx="7772400" cy="2377440"/>
-          </a:xfrm>
-          <a:prstGeom prst="rect">
-            <a:avLst/>
-          </a:prstGeom>
-        </p:spPr>
-        <p:txBody>
-          <a:bodyPr wrap="square" rtlCol="0">
-            <a:spAutoFit/>
-          </a:bodyPr>
-          <a:lstStyle/>
-          <a:p>
-            <a:r>
-              <a:rPr b="1" sz="1500">
-                <a:solidFill>
-                  <a:srgbClr val="1746D1"/>
-                </a:solidFill>
-                <a:latin typeface="Aptos"/>
-              </a:rPr>
-              <a:t>https://docs.github.com/copilot/how-tos/github-copilot-app</a:t>
-            </a:r>
-          </a:p>
-          <a:p>
-            <a:r>
-              <a:rPr b="1" sz="1500">
-                <a:solidFill>
-                  <a:srgbClr val="1746D1"/>
-                </a:solidFill>
-                <a:latin typeface="Aptos"/>
-              </a:rPr>
-              <a:t>https://docs.github.com/copilot/how-tos/github-copilot-app/agent-sessions</a:t>
-            </a:r>
-          </a:p>
-          <a:p>
-            <a:r>
-              <a:rPr b="1" sz="1500">
-                <a:solidFill>
-                  <a:srgbClr val="1746D1"/>
-                </a:solidFill>
-                <a:latin typeface="Aptos"/>
-              </a:rPr>
-              <a:t>https://docs.github.com/copilot/how-tos/github-copilot-app/managing-issues-and-pull-requests</a:t>
+              <a:t xml:space="preserve"> </a:t>
             </a:r>
           </a:p>
         </p:txBody>
@@ -8458,7 +9262,7 @@
             <a:avLst/>
           </a:prstGeom>
           <a:solidFill>
-            <a:srgbClr val="E8F0FF"/>
+            <a:srgbClr val="FFF3EF"/>
           </a:solidFill>
         </p:spPr>
         <p:txBody>
@@ -8466,81 +9270,349 @@
           <a:lstStyle/>
           <a:p>
             <a:r>
+              <a:rPr b="1" sz="1900">
+                <a:solidFill>
+                  <a:srgbClr val="C53F25"/>
+                </a:solidFill>
+                <a:latin typeface="Aptos"/>
+              </a:rPr>
+              <a:t>ALL LINKS  ·  aka.ms/ndc-oslo-copilot-workshop</a:t>
+            </a:r>
+          </a:p>
+        </p:txBody>
+      </p:sp>
+      <p:sp>
+        <p:nvSpPr>
+          <p:cNvPr id="9" name="TextBox 9"/>
+          <p:cNvSpPr txBox="1"/>
+          <p:nvPr/>
+        </p:nvSpPr>
+        <p:spPr>
+          <a:xfrm>
+            <a:off x="685800" y="6300216"/>
+            <a:ext cx="6858000" cy="320040"/>
+          </a:xfrm>
+          <a:prstGeom prst="rect">
+            <a:avLst/>
+          </a:prstGeom>
+        </p:spPr>
+        <p:txBody>
+          <a:bodyPr wrap="square" rtlCol="0">
+            <a:spAutoFit/>
+          </a:bodyPr>
+          <a:lstStyle/>
+          <a:p>
+            <a:r>
+              <a:rPr b="1" sz="1200" spc="120">
+                <a:solidFill>
+                  <a:srgbClr val="7A8497"/>
+                </a:solidFill>
+                <a:latin typeface="Aptos"/>
+              </a:rPr>
+              <a:t>NDC OSLO × GITHUB COPILOT WORKSHOP</a:t>
+            </a:r>
+          </a:p>
+        </p:txBody>
+      </p:sp>
+      <p:sp>
+        <p:nvSpPr>
+          <p:cNvPr id="10" name="TextBox 10"/>
+          <p:cNvSpPr txBox="1"/>
+          <p:nvPr/>
+        </p:nvSpPr>
+        <p:spPr>
+          <a:xfrm>
+            <a:off x="8046720" y="6300216"/>
+            <a:ext cx="640080" cy="320040"/>
+          </a:xfrm>
+          <a:prstGeom prst="rect">
+            <a:avLst/>
+          </a:prstGeom>
+        </p:spPr>
+        <p:txBody>
+          <a:bodyPr wrap="square" rtlCol="0">
+            <a:spAutoFit/>
+          </a:bodyPr>
+          <a:lstStyle/>
+          <a:p>
+            <a:r>
+              <a:rPr b="1" sz="1300">
+                <a:solidFill>
+                  <a:srgbClr val="C53F25"/>
+                </a:solidFill>
+                <a:latin typeface="Aptos"/>
+              </a:rPr>
+              <a:t>08</a:t>
+            </a:r>
+          </a:p>
+        </p:txBody>
+      </p:sp>
+      <p:sp>
+        <p:nvSpPr>
+          <p:cNvPr id="11" name="TextBox 11"/>
+          <p:cNvSpPr txBox="1"/>
+          <p:nvPr/>
+        </p:nvSpPr>
+        <p:spPr>
+          <a:xfrm>
+            <a:off x="1371600" y="3200400"/>
+            <a:ext cx="7086600" cy="792480"/>
+          </a:xfrm>
+          <a:prstGeom prst="rect">
+            <a:avLst/>
+          </a:prstGeom>
+        </p:spPr>
+        <p:txBody>
+          <a:bodyPr wrap="square" rtlCol="0">
+            <a:spAutoFit/>
+          </a:bodyPr>
+          <a:lstStyle/>
+          <a:p>
+            <a:r>
+              <a:rPr b="1" sz="2400">
+                <a:solidFill>
+                  <a:srgbClr val="172033"/>
+                </a:solidFill>
+                <a:latin typeface="Aptos"/>
+              </a:rPr>
+              <a:t>Agent sessions</a:t>
+            </a:r>
+          </a:p>
+          <a:p>
+            <a:r>
               <a:rPr b="1" sz="1600">
                 <a:solidFill>
-                  <a:srgbClr val="1746D1"/>
-                </a:solidFill>
-                <a:latin typeface="Aptos"/>
-              </a:rPr>
-              <a:t>CANVASES  ·  https://docs.github.com/copilot/how-tos/github-copilot-app/working-with-canvas-extensions</a:t>
-            </a:r>
-          </a:p>
-        </p:txBody>
-      </p:sp>
-      <p:sp>
-        <p:nvSpPr>
-          <p:cNvPr id="9" name="TextBox 9"/>
-          <p:cNvSpPr txBox="1"/>
-          <p:nvPr/>
-        </p:nvSpPr>
-        <p:spPr>
-          <a:xfrm>
-            <a:off x="685800" y="6355080"/>
-            <a:ext cx="6858000" cy="274320"/>
-          </a:xfrm>
-          <a:prstGeom prst="rect">
-            <a:avLst/>
-          </a:prstGeom>
-        </p:spPr>
-        <p:txBody>
-          <a:bodyPr wrap="square" rtlCol="0">
-            <a:spAutoFit/>
-          </a:bodyPr>
-          <a:lstStyle/>
-          <a:p>
-            <a:r>
-              <a:rPr b="1" sz="1000" spc="80">
-                <a:solidFill>
-                  <a:srgbClr val="7A8497"/>
-                </a:solidFill>
-                <a:latin typeface="Aptos"/>
-              </a:rPr>
-              <a:t>NDC OSLO × GITHUB COPILOT WORKSHOP</a:t>
-            </a:r>
-          </a:p>
-        </p:txBody>
-      </p:sp>
-      <p:sp>
-        <p:nvSpPr>
-          <p:cNvPr id="10" name="TextBox 10"/>
-          <p:cNvSpPr txBox="1"/>
-          <p:nvPr/>
-        </p:nvSpPr>
-        <p:spPr>
-          <a:xfrm>
-            <a:off x="8230000" y="6355080"/>
-            <a:ext cx="457200" cy="274320"/>
-          </a:xfrm>
-          <a:prstGeom prst="rect">
-            <a:avLst/>
-          </a:prstGeom>
-        </p:spPr>
-        <p:txBody>
-          <a:bodyPr wrap="square" rtlCol="0">
-            <a:spAutoFit/>
-          </a:bodyPr>
-          <a:lstStyle/>
-          <a:p>
-            <a:r>
-              <a:rPr b="1" sz="1000">
-                <a:solidFill>
-                  <a:srgbClr val="1746D1"/>
-                </a:solidFill>
-                <a:latin typeface="Aptos"/>
-              </a:rPr>
-              <a:t>08</a:t>
-            </a:r>
-          </a:p>
+                  <a:srgbClr val="C53F25"/>
+                </a:solidFill>
+                <a:latin typeface="Aptos"/>
+              </a:rPr>
+              <a:t>docs.github.com/copilot/how-tos/github-copilot-app/agent-sessions</a:t>
+            </a:r>
+          </a:p>
+        </p:txBody>
+      </p:sp>
+      <p:sp>
+        <p:nvSpPr>
+          <p:cNvPr id="12" name="TextBox 12"/>
+          <p:cNvSpPr txBox="1"/>
+          <p:nvPr/>
+        </p:nvSpPr>
+        <p:spPr>
+          <a:xfrm>
+            <a:off x="1371600" y="4023360"/>
+            <a:ext cx="7086600" cy="792480"/>
+          </a:xfrm>
+          <a:prstGeom prst="rect">
+            <a:avLst/>
+          </a:prstGeom>
+        </p:spPr>
+        <p:txBody>
+          <a:bodyPr wrap="square" rtlCol="0">
+            <a:spAutoFit/>
+          </a:bodyPr>
+          <a:lstStyle/>
+          <a:p>
+            <a:r>
+              <a:rPr b="1" sz="2400">
+                <a:solidFill>
+                  <a:srgbClr val="172033"/>
+                </a:solidFill>
+                <a:latin typeface="Aptos"/>
+              </a:rPr>
+              <a:t>Canvases, issues &amp; pull requests</a:t>
+            </a:r>
+          </a:p>
+          <a:p>
+            <a:r>
+              <a:rPr b="1" sz="1600">
+                <a:solidFill>
+                  <a:srgbClr val="C53F25"/>
+                </a:solidFill>
+                <a:latin typeface="Aptos"/>
+              </a:rPr>
+              <a:t>aka.ms/ndc-oslo-copilot-workshop  →  Resources</a:t>
+            </a:r>
+          </a:p>
+        </p:txBody>
+      </p:sp>
+      <p:sp>
+        <p:nvSpPr>
+          <p:cNvPr id="13" name="TextBox 13"/>
+          <p:cNvSpPr txBox="1"/>
+          <p:nvPr/>
+        </p:nvSpPr>
+        <p:spPr>
+          <a:xfrm>
+            <a:off x="685800" y="2465832"/>
+            <a:ext cx="594360" cy="320040"/>
+          </a:xfrm>
+          <a:prstGeom prst="rect">
+            <a:avLst/>
+          </a:prstGeom>
+        </p:spPr>
+        <p:txBody>
+          <a:bodyPr wrap="square" rtlCol="0">
+            <a:spAutoFit/>
+          </a:bodyPr>
+          <a:lstStyle/>
+          <a:p>
+            <a:r>
+              <a:rPr b="1" sz="1700" spc="60">
+                <a:solidFill>
+                  <a:srgbClr val="C53F25"/>
+                </a:solidFill>
+                <a:latin typeface="Aptos"/>
+              </a:rPr>
+              <a:t>01</a:t>
+            </a:r>
+          </a:p>
+        </p:txBody>
+      </p:sp>
+      <p:sp>
+        <p:nvSpPr>
+          <p:cNvPr id="14" name="TextBox 14"/>
+          <p:cNvSpPr txBox="1"/>
+          <p:nvPr/>
+        </p:nvSpPr>
+        <p:spPr>
+          <a:xfrm>
+            <a:off x="685800" y="3288792"/>
+            <a:ext cx="594360" cy="320040"/>
+          </a:xfrm>
+          <a:prstGeom prst="rect">
+            <a:avLst/>
+          </a:prstGeom>
+        </p:spPr>
+        <p:txBody>
+          <a:bodyPr wrap="square" rtlCol="0">
+            <a:spAutoFit/>
+          </a:bodyPr>
+          <a:lstStyle/>
+          <a:p>
+            <a:r>
+              <a:rPr b="1" sz="1700" spc="60">
+                <a:solidFill>
+                  <a:srgbClr val="C53F25"/>
+                </a:solidFill>
+                <a:latin typeface="Aptos"/>
+              </a:rPr>
+              <a:t>02</a:t>
+            </a:r>
+          </a:p>
+        </p:txBody>
+      </p:sp>
+      <p:sp>
+        <p:nvSpPr>
+          <p:cNvPr id="15" name="TextBox 15"/>
+          <p:cNvSpPr txBox="1"/>
+          <p:nvPr/>
+        </p:nvSpPr>
+        <p:spPr>
+          <a:xfrm>
+            <a:off x="685800" y="4111752"/>
+            <a:ext cx="594360" cy="320040"/>
+          </a:xfrm>
+          <a:prstGeom prst="rect">
+            <a:avLst/>
+          </a:prstGeom>
+        </p:spPr>
+        <p:txBody>
+          <a:bodyPr wrap="square" rtlCol="0">
+            <a:spAutoFit/>
+          </a:bodyPr>
+          <a:lstStyle/>
+          <a:p>
+            <a:r>
+              <a:rPr b="1" sz="1700" spc="60">
+                <a:solidFill>
+                  <a:srgbClr val="C53F25"/>
+                </a:solidFill>
+                <a:latin typeface="Aptos"/>
+              </a:rPr>
+              <a:t>03</a:t>
+            </a:r>
+          </a:p>
+        </p:txBody>
+      </p:sp>
+      <p:sp>
+        <p:nvSpPr>
+          <p:cNvPr id="16" name="Shape 16"/>
+          <p:cNvSpPr/>
+          <p:nvPr/>
+        </p:nvSpPr>
+        <p:spPr>
+          <a:xfrm>
+            <a:off x="685800" y="3063240"/>
+            <a:ext cx="7772400" cy="12700"/>
+          </a:xfrm>
+          <a:prstGeom prst="rect">
+            <a:avLst/>
+          </a:prstGeom>
+          <a:solidFill>
+            <a:srgbClr val="F0D7CF"/>
+          </a:solidFill>
+          <a:ln>
+            <a:noFill/>
+          </a:ln>
+        </p:spPr>
+        <p:txBody>
+          <a:bodyPr rtlCol="0" anchor="ctr"/>
+          <a:lstStyle/>
+          <a:p/>
+        </p:txBody>
+      </p:sp>
+      <p:sp>
+        <p:nvSpPr>
+          <p:cNvPr id="17" name="Shape 17"/>
+          <p:cNvSpPr/>
+          <p:nvPr/>
+        </p:nvSpPr>
+        <p:spPr>
+          <a:xfrm>
+            <a:off x="685800" y="3886200"/>
+            <a:ext cx="7772400" cy="12700"/>
+          </a:xfrm>
+          <a:prstGeom prst="rect">
+            <a:avLst/>
+          </a:prstGeom>
+          <a:solidFill>
+            <a:srgbClr val="F0D7CF"/>
+          </a:solidFill>
+          <a:ln>
+            <a:noFill/>
+          </a:ln>
+        </p:spPr>
+        <p:txBody>
+          <a:bodyPr rtlCol="0" anchor="ctr"/>
+          <a:lstStyle/>
+          <a:p/>
+        </p:txBody>
+      </p:sp>
+      <p:sp>
+        <p:nvSpPr>
+          <p:cNvPr id="18" name="Shape 18"/>
+          <p:cNvSpPr/>
+          <p:nvPr/>
+        </p:nvSpPr>
+        <p:spPr>
+          <a:xfrm>
+            <a:off x="685800" y="2011680"/>
+            <a:ext cx="594360" cy="54864"/>
+          </a:xfrm>
+          <a:prstGeom prst="rect">
+            <a:avLst/>
+          </a:prstGeom>
+          <a:solidFill>
+            <a:srgbClr val="E45A3E"/>
+          </a:solidFill>
+          <a:ln>
+            <a:noFill/>
+          </a:ln>
+        </p:spPr>
+        <p:txBody>
+          <a:bodyPr rtlCol="0" anchor="ctr"/>
+          <a:lstStyle/>
+          <a:p/>
         </p:txBody>
       </p:sp>
     </p:spTree>
@@ -8561,323 +9633,6 @@
         <p:nvPr/>
       </p:nvGrpSpPr>
       <p:grpSpPr/>
-      <p:sp>
-        <p:nvSpPr>
-          <p:cNvPr id="2" name="Shape 2"/>
-          <p:cNvSpPr/>
-          <p:nvPr/>
-        </p:nvSpPr>
-        <p:spPr>
-          <a:xfrm>
-            <a:off x="0" y="0"/>
-            <a:ext cx="137160" cy="6858000"/>
-          </a:xfrm>
-          <a:prstGeom prst="rect">
-            <a:avLst/>
-          </a:prstGeom>
-          <a:solidFill>
-            <a:srgbClr val="1746D1"/>
-          </a:solidFill>
-        </p:spPr>
-        <p:txBody>
-          <a:bodyPr rtlCol="0" anchor="ctr"/>
-          <a:lstStyle/>
-          <a:p/>
-        </p:txBody>
-      </p:sp>
-      <p:sp>
-        <p:nvSpPr>
-          <p:cNvPr id="3" name="Shape 3"/>
-          <p:cNvSpPr/>
-          <p:nvPr/>
-        </p:nvSpPr>
-        <p:spPr>
-          <a:xfrm>
-            <a:off x="685800" y="502920"/>
-            <a:ext cx="7772400" cy="45720"/>
-          </a:xfrm>
-          <a:prstGeom prst="rect">
-            <a:avLst/>
-          </a:prstGeom>
-          <a:solidFill>
-            <a:srgbClr val="CFD8E8"/>
-          </a:solidFill>
-        </p:spPr>
-        <p:txBody>
-          <a:bodyPr rtlCol="0" anchor="ctr"/>
-          <a:lstStyle/>
-          <a:p/>
-        </p:txBody>
-      </p:sp>
-      <p:sp>
-        <p:nvSpPr>
-          <p:cNvPr id="4" name="Shape 4"/>
-          <p:cNvSpPr/>
-          <p:nvPr/>
-        </p:nvSpPr>
-        <p:spPr>
-          <a:xfrm>
-            <a:off x="685800" y="411480"/>
-            <a:ext cx="182880" cy="182880"/>
-          </a:xfrm>
-          <a:prstGeom prst="ellipse">
-            <a:avLst/>
-          </a:prstGeom>
-          <a:solidFill>
-            <a:srgbClr val="E45A3E"/>
-          </a:solidFill>
-        </p:spPr>
-        <p:txBody>
-          <a:bodyPr rtlCol="0" anchor="ctr"/>
-          <a:lstStyle/>
-          <a:p/>
-        </p:txBody>
-      </p:sp>
-      <p:sp>
-        <p:nvSpPr>
-          <p:cNvPr id="5" name="TextBox 5"/>
-          <p:cNvSpPr txBox="1"/>
-          <p:nvPr/>
-        </p:nvSpPr>
-        <p:spPr>
-          <a:xfrm>
-            <a:off x="960120" y="365760"/>
-            <a:ext cx="5486400" cy="274320"/>
-          </a:xfrm>
-          <a:prstGeom prst="rect">
-            <a:avLst/>
-          </a:prstGeom>
-        </p:spPr>
-        <p:txBody>
-          <a:bodyPr wrap="square" rtlCol="0">
-            <a:spAutoFit/>
-          </a:bodyPr>
-          <a:lstStyle/>
-          <a:p>
-            <a:r>
-              <a:rPr b="1" sz="1200" spc="120">
-                <a:solidFill>
-                  <a:srgbClr val="1746D1"/>
-                </a:solidFill>
-                <a:latin typeface="Aptos"/>
-              </a:rPr>
-              <a:t>KEEP BUILDING</a:t>
-            </a:r>
-          </a:p>
-        </p:txBody>
-      </p:sp>
-      <p:sp>
-        <p:nvSpPr>
-          <p:cNvPr id="6" name="TextBox 6"/>
-          <p:cNvSpPr txBox="1"/>
-          <p:nvPr/>
-        </p:nvSpPr>
-        <p:spPr>
-          <a:xfrm>
-            <a:off x="685800" y="868680"/>
-            <a:ext cx="7772400" cy="1005840"/>
-          </a:xfrm>
-          <a:prstGeom prst="rect">
-            <a:avLst/>
-          </a:prstGeom>
-        </p:spPr>
-        <p:txBody>
-          <a:bodyPr wrap="square" rtlCol="0">
-            <a:spAutoFit/>
-          </a:bodyPr>
-          <a:lstStyle/>
-          <a:p>
-            <a:r>
-              <a:rPr b="1" sz="3400" spc="-80">
-                <a:solidFill>
-                  <a:srgbClr val="172033"/>
-                </a:solidFill>
-                <a:latin typeface="Aptos Display"/>
-              </a:rPr>
-              <a:t>Take the route home.</a:t>
-            </a:r>
-          </a:p>
-        </p:txBody>
-      </p:sp>
-      <p:sp>
-        <p:nvSpPr>
-          <p:cNvPr id="7" name="TextBox 7"/>
-          <p:cNvSpPr txBox="1"/>
-          <p:nvPr/>
-        </p:nvSpPr>
-        <p:spPr>
-          <a:xfrm>
-            <a:off x="685800" y="2103120"/>
-            <a:ext cx="4206240" cy="2377440"/>
-          </a:xfrm>
-          <a:prstGeom prst="rect">
-            <a:avLst/>
-          </a:prstGeom>
-        </p:spPr>
-        <p:txBody>
-          <a:bodyPr wrap="square" rtlCol="0">
-            <a:spAutoFit/>
-          </a:bodyPr>
-          <a:lstStyle/>
-          <a:p>
-            <a:r>
-              <a:rPr sz="2000">
-                <a:solidFill>
-                  <a:srgbClr val="455166"/>
-                </a:solidFill>
-                <a:latin typeface="Aptos"/>
-              </a:rPr>
-              <a:t>Revisit the workshop to finish lessons, repeat exercises, and follow the documentation.</a:t>
-            </a:r>
-          </a:p>
-          <a:p>
-            <a:r>
-              <a:rPr sz="2000">
-                <a:solidFill>
-                  <a:srgbClr val="455166"/>
-                </a:solidFill>
-                <a:latin typeface="Aptos"/>
-              </a:rPr>
-              <a:t>Share the workflows that worked—and the agent boundaries that made them trustworthy.</a:t>
-            </a:r>
-          </a:p>
-          <a:p>
-            <a:r>
-              <a:rPr sz="2000">
-                <a:solidFill>
-                  <a:srgbClr val="455166"/>
-                </a:solidFill>
-                <a:latin typeface="Aptos"/>
-              </a:rPr>
-              <a:t>Scan the code or use the short link to return at any time.</a:t>
-            </a:r>
-          </a:p>
-        </p:txBody>
-      </p:sp>
-      <p:sp>
-        <p:nvSpPr>
-          <p:cNvPr id="8" name="Shape 8"/>
-          <p:cNvSpPr/>
-          <p:nvPr/>
-        </p:nvSpPr>
-        <p:spPr>
-          <a:xfrm>
-            <a:off x="685800" y="4937760"/>
-            <a:ext cx="7772400" cy="914400"/>
-          </a:xfrm>
-          <a:prstGeom prst="roundRect">
-            <a:avLst/>
-          </a:prstGeom>
-          <a:solidFill>
-            <a:srgbClr val="E8F0FF"/>
-          </a:solidFill>
-        </p:spPr>
-        <p:txBody>
-          <a:bodyPr rtlCol="0" anchor="ctr"/>
-          <a:lstStyle/>
-          <a:p>
-            <a:r>
-              <a:rPr b="1" sz="1600">
-                <a:solidFill>
-                  <a:srgbClr val="1746D1"/>
-                </a:solidFill>
-                <a:latin typeface="Aptos"/>
-              </a:rPr>
-              <a:t>WORKSHOP  ·  https://aka.ms/ndc-oslo-copilot-workshop</a:t>
-            </a:r>
-          </a:p>
-        </p:txBody>
-      </p:sp>
-      <p:sp>
-        <p:nvSpPr>
-          <p:cNvPr id="9" name="TextBox 9"/>
-          <p:cNvSpPr txBox="1"/>
-          <p:nvPr/>
-        </p:nvSpPr>
-        <p:spPr>
-          <a:xfrm>
-            <a:off x="685800" y="6355080"/>
-            <a:ext cx="6858000" cy="274320"/>
-          </a:xfrm>
-          <a:prstGeom prst="rect">
-            <a:avLst/>
-          </a:prstGeom>
-        </p:spPr>
-        <p:txBody>
-          <a:bodyPr wrap="square" rtlCol="0">
-            <a:spAutoFit/>
-          </a:bodyPr>
-          <a:lstStyle/>
-          <a:p>
-            <a:r>
-              <a:rPr b="1" sz="1000" spc="80">
-                <a:solidFill>
-                  <a:srgbClr val="7A8497"/>
-                </a:solidFill>
-                <a:latin typeface="Aptos"/>
-              </a:rPr>
-              <a:t>NDC OSLO × GITHUB COPILOT WORKSHOP</a:t>
-            </a:r>
-          </a:p>
-        </p:txBody>
-      </p:sp>
-      <p:sp>
-        <p:nvSpPr>
-          <p:cNvPr id="10" name="TextBox 10"/>
-          <p:cNvSpPr txBox="1"/>
-          <p:nvPr/>
-        </p:nvSpPr>
-        <p:spPr>
-          <a:xfrm>
-            <a:off x="8230000" y="6355080"/>
-            <a:ext cx="457200" cy="274320"/>
-          </a:xfrm>
-          <a:prstGeom prst="rect">
-            <a:avLst/>
-          </a:prstGeom>
-        </p:spPr>
-        <p:txBody>
-          <a:bodyPr wrap="square" rtlCol="0">
-            <a:spAutoFit/>
-          </a:bodyPr>
-          <a:lstStyle/>
-          <a:p>
-            <a:r>
-              <a:rPr b="1" sz="1000">
-                <a:solidFill>
-                  <a:srgbClr val="1746D1"/>
-                </a:solidFill>
-                <a:latin typeface="Aptos"/>
-              </a:rPr>
-              <a:t>09</a:t>
-            </a:r>
-          </a:p>
-        </p:txBody>
-      </p:sp>
-      <p:sp>
-        <p:nvSpPr>
-          <p:cNvPr id="11" name="Shape 11"/>
-          <p:cNvSpPr/>
-          <p:nvPr/>
-        </p:nvSpPr>
-        <p:spPr>
-          <a:xfrm>
-            <a:off x="5257800" y="1143000"/>
-            <a:ext cx="3200400" cy="3657600"/>
-          </a:xfrm>
-          <a:prstGeom prst="roundRect">
-            <a:avLst/>
-          </a:prstGeom>
-          <a:solidFill>
-            <a:srgbClr val="E8F0FF"/>
-          </a:solidFill>
-        </p:spPr>
-        <p:txBody>
-          <a:bodyPr rtlCol="0" anchor="ctr"/>
-          <a:lstStyle/>
-          <a:p/>
-        </p:txBody>
-      </p:sp>
       <p:pic>
         <p:nvPicPr>
           <p:cNvPr id="12" name="Picture 12"/>
@@ -8902,6 +9657,323 @@
           </a:prstGeom>
         </p:spPr>
       </p:pic>
+      <p:sp>
+        <p:nvSpPr>
+          <p:cNvPr id="2" name="Shape 2"/>
+          <p:cNvSpPr/>
+          <p:nvPr/>
+        </p:nvSpPr>
+        <p:spPr>
+          <a:xfrm>
+            <a:off x="0" y="0"/>
+            <a:ext cx="137160" cy="6858000"/>
+          </a:xfrm>
+          <a:prstGeom prst="rect">
+            <a:avLst/>
+          </a:prstGeom>
+          <a:solidFill>
+            <a:srgbClr val="1746D1"/>
+          </a:solidFill>
+        </p:spPr>
+        <p:txBody>
+          <a:bodyPr rtlCol="0" anchor="ctr"/>
+          <a:lstStyle/>
+          <a:p/>
+        </p:txBody>
+      </p:sp>
+      <p:sp>
+        <p:nvSpPr>
+          <p:cNvPr id="3" name="Shape 3"/>
+          <p:cNvSpPr/>
+          <p:nvPr/>
+        </p:nvSpPr>
+        <p:spPr>
+          <a:xfrm>
+            <a:off x="685800" y="502920"/>
+            <a:ext cx="7772400" cy="45720"/>
+          </a:xfrm>
+          <a:prstGeom prst="rect">
+            <a:avLst/>
+          </a:prstGeom>
+          <a:solidFill>
+            <a:srgbClr val="CFD8E8"/>
+          </a:solidFill>
+        </p:spPr>
+        <p:txBody>
+          <a:bodyPr rtlCol="0" anchor="ctr"/>
+          <a:lstStyle/>
+          <a:p/>
+        </p:txBody>
+      </p:sp>
+      <p:sp>
+        <p:nvSpPr>
+          <p:cNvPr id="4" name="Shape 4"/>
+          <p:cNvSpPr/>
+          <p:nvPr/>
+        </p:nvSpPr>
+        <p:spPr>
+          <a:xfrm>
+            <a:off x="685800" y="411480"/>
+            <a:ext cx="182880" cy="182880"/>
+          </a:xfrm>
+          <a:prstGeom prst="ellipse">
+            <a:avLst/>
+          </a:prstGeom>
+          <a:solidFill>
+            <a:srgbClr val="E45A3E"/>
+          </a:solidFill>
+        </p:spPr>
+        <p:txBody>
+          <a:bodyPr rtlCol="0" anchor="ctr"/>
+          <a:lstStyle/>
+          <a:p/>
+        </p:txBody>
+      </p:sp>
+      <p:sp>
+        <p:nvSpPr>
+          <p:cNvPr id="5" name="TextBox 5"/>
+          <p:cNvSpPr txBox="1"/>
+          <p:nvPr/>
+        </p:nvSpPr>
+        <p:spPr>
+          <a:xfrm>
+            <a:off x="960120" y="347472"/>
+            <a:ext cx="6858000" cy="310896"/>
+          </a:xfrm>
+          <a:prstGeom prst="rect">
+            <a:avLst/>
+          </a:prstGeom>
+        </p:spPr>
+        <p:txBody>
+          <a:bodyPr wrap="square" rtlCol="0">
+            <a:spAutoFit/>
+          </a:bodyPr>
+          <a:lstStyle/>
+          <a:p>
+            <a:r>
+              <a:rPr b="1" sz="1500" spc="240">
+                <a:solidFill>
+                  <a:srgbClr val="1746D1"/>
+                </a:solidFill>
+                <a:latin typeface="Aptos"/>
+              </a:rPr>
+              <a:t>KEEP BUILDING</a:t>
+            </a:r>
+          </a:p>
+        </p:txBody>
+      </p:sp>
+      <p:sp>
+        <p:nvSpPr>
+          <p:cNvPr id="6" name="TextBox 6"/>
+          <p:cNvSpPr txBox="1"/>
+          <p:nvPr/>
+        </p:nvSpPr>
+        <p:spPr>
+          <a:xfrm>
+            <a:off x="685800" y="754380"/>
+            <a:ext cx="4572000" cy="1280160"/>
+          </a:xfrm>
+          <a:prstGeom prst="rect">
+            <a:avLst/>
+          </a:prstGeom>
+        </p:spPr>
+        <p:txBody>
+          <a:bodyPr wrap="square" rtlCol="0">
+            <a:spAutoFit/>
+          </a:bodyPr>
+          <a:lstStyle/>
+          <a:p>
+            <a:r>
+              <a:rPr b="1" sz="3600" spc="-60">
+                <a:solidFill>
+                  <a:srgbClr val="172033"/>
+                </a:solidFill>
+                <a:latin typeface="Aptos Display"/>
+              </a:rPr>
+              <a:t>Take the route home.</a:t>
+            </a:r>
+          </a:p>
+        </p:txBody>
+      </p:sp>
+      <p:sp>
+        <p:nvSpPr>
+          <p:cNvPr id="7" name="TextBox 7"/>
+          <p:cNvSpPr txBox="1"/>
+          <p:nvPr/>
+        </p:nvSpPr>
+        <p:spPr>
+          <a:xfrm>
+            <a:off x="685800" y="2286000"/>
+            <a:ext cx="4206240" cy="2377440"/>
+          </a:xfrm>
+          <a:prstGeom prst="rect">
+            <a:avLst/>
+          </a:prstGeom>
+        </p:spPr>
+        <p:txBody>
+          <a:bodyPr wrap="square" rtlCol="0">
+            <a:spAutoFit/>
+          </a:bodyPr>
+          <a:lstStyle/>
+          <a:p>
+            <a:r>
+              <a:rPr sz="2000">
+                <a:solidFill>
+                  <a:srgbClr val="455166"/>
+                </a:solidFill>
+                <a:latin typeface="Aptos"/>
+              </a:rPr>
+              <a:t>Finish the lessons at your own pace.</a:t>
+            </a:r>
+          </a:p>
+          <a:p>
+            <a:r>
+              <a:rPr sz="2000">
+                <a:solidFill>
+                  <a:srgbClr val="455166"/>
+                </a:solidFill>
+                <a:latin typeface="Aptos"/>
+              </a:rPr>
+              <a:t>Repeat the exercises on your own repos.</a:t>
+            </a:r>
+          </a:p>
+          <a:p>
+            <a:r>
+              <a:rPr sz="2000">
+                <a:solidFill>
+                  <a:srgbClr val="455166"/>
+                </a:solidFill>
+                <a:latin typeface="Aptos"/>
+              </a:rPr>
+              <a:t>Scan to return at any time.</a:t>
+            </a:r>
+          </a:p>
+        </p:txBody>
+      </p:sp>
+      <p:sp>
+        <p:nvSpPr>
+          <p:cNvPr id="8" name="Shape 8"/>
+          <p:cNvSpPr/>
+          <p:nvPr/>
+        </p:nvSpPr>
+        <p:spPr>
+          <a:xfrm>
+            <a:off x="685800" y="4937760"/>
+            <a:ext cx="7772400" cy="914400"/>
+          </a:xfrm>
+          <a:prstGeom prst="roundRect">
+            <a:avLst/>
+          </a:prstGeom>
+          <a:solidFill>
+            <a:srgbClr val="E8F0FF"/>
+          </a:solidFill>
+        </p:spPr>
+        <p:txBody>
+          <a:bodyPr rtlCol="0" anchor="ctr"/>
+          <a:lstStyle/>
+          <a:p>
+            <a:r>
+              <a:rPr b="1" sz="1900">
+                <a:solidFill>
+                  <a:srgbClr val="1746D1"/>
+                </a:solidFill>
+                <a:latin typeface="Aptos"/>
+              </a:rPr>
+              <a:t>WORKSHOP  ·  aka.ms/ndc-oslo-copilot-workshop</a:t>
+            </a:r>
+          </a:p>
+        </p:txBody>
+      </p:sp>
+      <p:sp>
+        <p:nvSpPr>
+          <p:cNvPr id="9" name="TextBox 9"/>
+          <p:cNvSpPr txBox="1"/>
+          <p:nvPr/>
+        </p:nvSpPr>
+        <p:spPr>
+          <a:xfrm>
+            <a:off x="685800" y="6300216"/>
+            <a:ext cx="6858000" cy="320040"/>
+          </a:xfrm>
+          <a:prstGeom prst="rect">
+            <a:avLst/>
+          </a:prstGeom>
+        </p:spPr>
+        <p:txBody>
+          <a:bodyPr wrap="square" rtlCol="0">
+            <a:spAutoFit/>
+          </a:bodyPr>
+          <a:lstStyle/>
+          <a:p>
+            <a:r>
+              <a:rPr b="1" sz="1200" spc="120">
+                <a:solidFill>
+                  <a:srgbClr val="7A8497"/>
+                </a:solidFill>
+                <a:latin typeface="Aptos"/>
+              </a:rPr>
+              <a:t>NDC OSLO × GITHUB COPILOT WORKSHOP</a:t>
+            </a:r>
+          </a:p>
+        </p:txBody>
+      </p:sp>
+      <p:sp>
+        <p:nvSpPr>
+          <p:cNvPr id="10" name="TextBox 10"/>
+          <p:cNvSpPr txBox="1"/>
+          <p:nvPr/>
+        </p:nvSpPr>
+        <p:spPr>
+          <a:xfrm>
+            <a:off x="8046720" y="6300216"/>
+            <a:ext cx="640080" cy="320040"/>
+          </a:xfrm>
+          <a:prstGeom prst="rect">
+            <a:avLst/>
+          </a:prstGeom>
+        </p:spPr>
+        <p:txBody>
+          <a:bodyPr wrap="square" rtlCol="0">
+            <a:spAutoFit/>
+          </a:bodyPr>
+          <a:lstStyle/>
+          <a:p>
+            <a:r>
+              <a:rPr b="1" sz="1300">
+                <a:solidFill>
+                  <a:srgbClr val="1746D1"/>
+                </a:solidFill>
+                <a:latin typeface="Aptos"/>
+              </a:rPr>
+              <a:t>09</a:t>
+            </a:r>
+          </a:p>
+        </p:txBody>
+      </p:sp>
+      <p:sp>
+        <p:nvSpPr>
+          <p:cNvPr id="11" name="Shape 11"/>
+          <p:cNvSpPr/>
+          <p:nvPr/>
+        </p:nvSpPr>
+        <p:spPr>
+          <a:xfrm>
+            <a:off x="5257800" y="1143000"/>
+            <a:ext cx="3200400" cy="3657600"/>
+          </a:xfrm>
+          <a:prstGeom prst="roundRect">
+            <a:avLst/>
+          </a:prstGeom>
+          <a:solidFill>
+            <a:srgbClr val="E8F0FF"/>
+          </a:solidFill>
+        </p:spPr>
+        <p:txBody>
+          <a:bodyPr rtlCol="0" anchor="ctr"/>
+          <a:lstStyle/>
+          <a:p/>
+        </p:txBody>
+      </p:sp>
       <p:pic>
         <p:nvPicPr>
           <p:cNvPr id="13" name="Picture 13"/>
@@ -8926,6 +9998,66 @@
           </a:prstGeom>
         </p:spPr>
       </p:pic>
+      <p:sp>
+        <p:nvSpPr>
+          <p:cNvPr id="14" name="Shape 14"/>
+          <p:cNvSpPr/>
+          <p:nvPr/>
+        </p:nvSpPr>
+        <p:spPr>
+          <a:xfrm>
+            <a:off x="685800" y="2011680"/>
+            <a:ext cx="594360" cy="54864"/>
+          </a:xfrm>
+          <a:prstGeom prst="rect">
+            <a:avLst/>
+          </a:prstGeom>
+          <a:solidFill>
+            <a:srgbClr val="E45A3E"/>
+          </a:solidFill>
+          <a:ln>
+            <a:noFill/>
+          </a:ln>
+        </p:spPr>
+        <p:txBody>
+          <a:bodyPr rtlCol="0" anchor="ctr"/>
+          <a:lstStyle/>
+          <a:p/>
+        </p:txBody>
+      </p:sp>
+      <p:sp>
+        <p:nvSpPr>
+          <p:cNvPr id="15" name="TextBox 15"/>
+          <p:cNvSpPr txBox="1"/>
+          <p:nvPr/>
+        </p:nvSpPr>
+        <p:spPr>
+          <a:xfrm>
+            <a:off x="5669280" y="4114800"/>
+            <a:ext cx="2423160" cy="320040"/>
+          </a:xfrm>
+          <a:prstGeom prst="rect">
+            <a:avLst/>
+          </a:prstGeom>
+        </p:spPr>
+        <p:txBody>
+          <a:bodyPr wrap="square" rtlCol="0">
+            <a:spAutoFit/>
+          </a:bodyPr>
+          <a:lstStyle/>
+          <a:p>
+            <a:r>
+              <a:rPr b="1" sz="1400" spc="200">
+                <a:solidFill>
+                  <a:srgbClr val="1746D1"/>
+                </a:solidFill>
+                <a:latin typeface="Aptos"/>
+              </a:rPr>
+              <a:t>SCAN TO RETURN</a:t>
+            </a:r>
+          </a:p>
+        </p:txBody>
+      </p:sp>
     </p:spTree>
   </p:cSld>
   <p:clrMapOvr>
@@ -9255,323 +10387,6 @@
         <p:nvPr/>
       </p:nvGrpSpPr>
       <p:grpSpPr/>
-      <p:sp>
-        <p:nvSpPr>
-          <p:cNvPr id="2" name="Shape 2"/>
-          <p:cNvSpPr/>
-          <p:nvPr/>
-        </p:nvSpPr>
-        <p:spPr>
-          <a:xfrm>
-            <a:off x="0" y="0"/>
-            <a:ext cx="137160" cy="6858000"/>
-          </a:xfrm>
-          <a:prstGeom prst="rect">
-            <a:avLst/>
-          </a:prstGeom>
-          <a:solidFill>
-            <a:srgbClr val="1746D1"/>
-          </a:solidFill>
-        </p:spPr>
-        <p:txBody>
-          <a:bodyPr rtlCol="0" anchor="ctr"/>
-          <a:lstStyle/>
-          <a:p/>
-        </p:txBody>
-      </p:sp>
-      <p:sp>
-        <p:nvSpPr>
-          <p:cNvPr id="3" name="Shape 3"/>
-          <p:cNvSpPr/>
-          <p:nvPr/>
-        </p:nvSpPr>
-        <p:spPr>
-          <a:xfrm>
-            <a:off x="685800" y="502920"/>
-            <a:ext cx="7772400" cy="45720"/>
-          </a:xfrm>
-          <a:prstGeom prst="rect">
-            <a:avLst/>
-          </a:prstGeom>
-          <a:solidFill>
-            <a:srgbClr val="CFD8E8"/>
-          </a:solidFill>
-        </p:spPr>
-        <p:txBody>
-          <a:bodyPr rtlCol="0" anchor="ctr"/>
-          <a:lstStyle/>
-          <a:p/>
-        </p:txBody>
-      </p:sp>
-      <p:sp>
-        <p:nvSpPr>
-          <p:cNvPr id="4" name="Shape 4"/>
-          <p:cNvSpPr/>
-          <p:nvPr/>
-        </p:nvSpPr>
-        <p:spPr>
-          <a:xfrm>
-            <a:off x="685800" y="411480"/>
-            <a:ext cx="182880" cy="182880"/>
-          </a:xfrm>
-          <a:prstGeom prst="ellipse">
-            <a:avLst/>
-          </a:prstGeom>
-          <a:solidFill>
-            <a:srgbClr val="E45A3E"/>
-          </a:solidFill>
-        </p:spPr>
-        <p:txBody>
-          <a:bodyPr rtlCol="0" anchor="ctr"/>
-          <a:lstStyle/>
-          <a:p/>
-        </p:txBody>
-      </p:sp>
-      <p:sp>
-        <p:nvSpPr>
-          <p:cNvPr id="5" name="TextBox 5"/>
-          <p:cNvSpPr txBox="1"/>
-          <p:nvPr/>
-        </p:nvSpPr>
-        <p:spPr>
-          <a:xfrm>
-            <a:off x="960120" y="365760"/>
-            <a:ext cx="5486400" cy="274320"/>
-          </a:xfrm>
-          <a:prstGeom prst="rect">
-            <a:avLst/>
-          </a:prstGeom>
-        </p:spPr>
-        <p:txBody>
-          <a:bodyPr wrap="square" rtlCol="0">
-            <a:spAutoFit/>
-          </a:bodyPr>
-          <a:lstStyle/>
-          <a:p>
-            <a:r>
-              <a:rPr b="1" sz="1200" spc="120">
-                <a:solidFill>
-                  <a:srgbClr val="1746D1"/>
-                </a:solidFill>
-                <a:latin typeface="Aptos"/>
-              </a:rPr>
-              <a:t>START HERE</a:t>
-            </a:r>
-          </a:p>
-        </p:txBody>
-      </p:sp>
-      <p:sp>
-        <p:nvSpPr>
-          <p:cNvPr id="6" name="TextBox 6"/>
-          <p:cNvSpPr txBox="1"/>
-          <p:nvPr/>
-        </p:nvSpPr>
-        <p:spPr>
-          <a:xfrm>
-            <a:off x="685800" y="868680"/>
-            <a:ext cx="7772400" cy="1005840"/>
-          </a:xfrm>
-          <a:prstGeom prst="rect">
-            <a:avLst/>
-          </a:prstGeom>
-        </p:spPr>
-        <p:txBody>
-          <a:bodyPr wrap="square" rtlCol="0">
-            <a:spAutoFit/>
-          </a:bodyPr>
-          <a:lstStyle/>
-          <a:p>
-            <a:r>
-              <a:rPr b="1" sz="3400" spc="-80">
-                <a:solidFill>
-                  <a:srgbClr val="172033"/>
-                </a:solidFill>
-                <a:latin typeface="Aptos Display"/>
-              </a:rPr>
-              <a:t>Scan once. Keep this route open.</a:t>
-            </a:r>
-          </a:p>
-        </p:txBody>
-      </p:sp>
-      <p:sp>
-        <p:nvSpPr>
-          <p:cNvPr id="7" name="TextBox 7"/>
-          <p:cNvSpPr txBox="1"/>
-          <p:nvPr/>
-        </p:nvSpPr>
-        <p:spPr>
-          <a:xfrm>
-            <a:off x="685800" y="2103120"/>
-            <a:ext cx="4206240" cy="2377440"/>
-          </a:xfrm>
-          <a:prstGeom prst="rect">
-            <a:avLst/>
-          </a:prstGeom>
-        </p:spPr>
-        <p:txBody>
-          <a:bodyPr wrap="square" rtlCol="0">
-            <a:spAutoFit/>
-          </a:bodyPr>
-          <a:lstStyle/>
-          <a:p>
-            <a:r>
-              <a:rPr sz="2000">
-                <a:solidFill>
-                  <a:srgbClr val="455166"/>
-                </a:solidFill>
-                <a:latin typeface="Aptos"/>
-              </a:rPr>
-              <a:t>Preparation, both labs, lesson order, resources, and browser-saved progress.</a:t>
-            </a:r>
-          </a:p>
-          <a:p>
-            <a:r>
-              <a:rPr sz="2000">
-                <a:solidFill>
-                  <a:srgbClr val="455166"/>
-                </a:solidFill>
-                <a:latin typeface="Aptos"/>
-              </a:rPr>
-              <a:t>Open the workshop on your laptop before we begin.</a:t>
-            </a:r>
-          </a:p>
-          <a:p>
-            <a:r>
-              <a:rPr sz="2000">
-                <a:solidFill>
-                  <a:srgbClr val="455166"/>
-                </a:solidFill>
-                <a:latin typeface="Aptos"/>
-              </a:rPr>
-              <a:t>Use the same route whenever you need to resume.</a:t>
-            </a:r>
-          </a:p>
-        </p:txBody>
-      </p:sp>
-      <p:sp>
-        <p:nvSpPr>
-          <p:cNvPr id="8" name="Shape 8"/>
-          <p:cNvSpPr/>
-          <p:nvPr/>
-        </p:nvSpPr>
-        <p:spPr>
-          <a:xfrm>
-            <a:off x="685800" y="4937760"/>
-            <a:ext cx="7772400" cy="914400"/>
-          </a:xfrm>
-          <a:prstGeom prst="roundRect">
-            <a:avLst/>
-          </a:prstGeom>
-          <a:solidFill>
-            <a:srgbClr val="E8F0FF"/>
-          </a:solidFill>
-        </p:spPr>
-        <p:txBody>
-          <a:bodyPr rtlCol="0" anchor="ctr"/>
-          <a:lstStyle/>
-          <a:p>
-            <a:r>
-              <a:rPr b="1" sz="1600">
-                <a:solidFill>
-                  <a:srgbClr val="1746D1"/>
-                </a:solidFill>
-                <a:latin typeface="Aptos"/>
-              </a:rPr>
-              <a:t>WORKSHOP  ·  https://aka.ms/ndc-oslo-copilot-workshop</a:t>
-            </a:r>
-          </a:p>
-        </p:txBody>
-      </p:sp>
-      <p:sp>
-        <p:nvSpPr>
-          <p:cNvPr id="9" name="TextBox 9"/>
-          <p:cNvSpPr txBox="1"/>
-          <p:nvPr/>
-        </p:nvSpPr>
-        <p:spPr>
-          <a:xfrm>
-            <a:off x="685800" y="6355080"/>
-            <a:ext cx="6858000" cy="274320"/>
-          </a:xfrm>
-          <a:prstGeom prst="rect">
-            <a:avLst/>
-          </a:prstGeom>
-        </p:spPr>
-        <p:txBody>
-          <a:bodyPr wrap="square" rtlCol="0">
-            <a:spAutoFit/>
-          </a:bodyPr>
-          <a:lstStyle/>
-          <a:p>
-            <a:r>
-              <a:rPr b="1" sz="1000" spc="80">
-                <a:solidFill>
-                  <a:srgbClr val="7A8497"/>
-                </a:solidFill>
-                <a:latin typeface="Aptos"/>
-              </a:rPr>
-              <a:t>NDC OSLO × GITHUB COPILOT WORKSHOP</a:t>
-            </a:r>
-          </a:p>
-        </p:txBody>
-      </p:sp>
-      <p:sp>
-        <p:nvSpPr>
-          <p:cNvPr id="10" name="TextBox 10"/>
-          <p:cNvSpPr txBox="1"/>
-          <p:nvPr/>
-        </p:nvSpPr>
-        <p:spPr>
-          <a:xfrm>
-            <a:off x="8230000" y="6355080"/>
-            <a:ext cx="457200" cy="274320"/>
-          </a:xfrm>
-          <a:prstGeom prst="rect">
-            <a:avLst/>
-          </a:prstGeom>
-        </p:spPr>
-        <p:txBody>
-          <a:bodyPr wrap="square" rtlCol="0">
-            <a:spAutoFit/>
-          </a:bodyPr>
-          <a:lstStyle/>
-          <a:p>
-            <a:r>
-              <a:rPr b="1" sz="1000">
-                <a:solidFill>
-                  <a:srgbClr val="1746D1"/>
-                </a:solidFill>
-                <a:latin typeface="Aptos"/>
-              </a:rPr>
-              <a:t>03</a:t>
-            </a:r>
-          </a:p>
-        </p:txBody>
-      </p:sp>
-      <p:sp>
-        <p:nvSpPr>
-          <p:cNvPr id="11" name="Shape 11"/>
-          <p:cNvSpPr/>
-          <p:nvPr/>
-        </p:nvSpPr>
-        <p:spPr>
-          <a:xfrm>
-            <a:off x="5257800" y="1143000"/>
-            <a:ext cx="3200400" cy="3657600"/>
-          </a:xfrm>
-          <a:prstGeom prst="roundRect">
-            <a:avLst/>
-          </a:prstGeom>
-          <a:solidFill>
-            <a:srgbClr val="E8F0FF"/>
-          </a:solidFill>
-        </p:spPr>
-        <p:txBody>
-          <a:bodyPr rtlCol="0" anchor="ctr"/>
-          <a:lstStyle/>
-          <a:p/>
-        </p:txBody>
-      </p:sp>
       <p:pic>
         <p:nvPicPr>
           <p:cNvPr id="12" name="Picture 12"/>
@@ -9596,6 +10411,323 @@
           </a:prstGeom>
         </p:spPr>
       </p:pic>
+      <p:sp>
+        <p:nvSpPr>
+          <p:cNvPr id="2" name="Shape 2"/>
+          <p:cNvSpPr/>
+          <p:nvPr/>
+        </p:nvSpPr>
+        <p:spPr>
+          <a:xfrm>
+            <a:off x="0" y="0"/>
+            <a:ext cx="137160" cy="6858000"/>
+          </a:xfrm>
+          <a:prstGeom prst="rect">
+            <a:avLst/>
+          </a:prstGeom>
+          <a:solidFill>
+            <a:srgbClr val="1746D1"/>
+          </a:solidFill>
+        </p:spPr>
+        <p:txBody>
+          <a:bodyPr rtlCol="0" anchor="ctr"/>
+          <a:lstStyle/>
+          <a:p/>
+        </p:txBody>
+      </p:sp>
+      <p:sp>
+        <p:nvSpPr>
+          <p:cNvPr id="3" name="Shape 3"/>
+          <p:cNvSpPr/>
+          <p:nvPr/>
+        </p:nvSpPr>
+        <p:spPr>
+          <a:xfrm>
+            <a:off x="685800" y="502920"/>
+            <a:ext cx="7772400" cy="45720"/>
+          </a:xfrm>
+          <a:prstGeom prst="rect">
+            <a:avLst/>
+          </a:prstGeom>
+          <a:solidFill>
+            <a:srgbClr val="CFD8E8"/>
+          </a:solidFill>
+        </p:spPr>
+        <p:txBody>
+          <a:bodyPr rtlCol="0" anchor="ctr"/>
+          <a:lstStyle/>
+          <a:p/>
+        </p:txBody>
+      </p:sp>
+      <p:sp>
+        <p:nvSpPr>
+          <p:cNvPr id="4" name="Shape 4"/>
+          <p:cNvSpPr/>
+          <p:nvPr/>
+        </p:nvSpPr>
+        <p:spPr>
+          <a:xfrm>
+            <a:off x="685800" y="411480"/>
+            <a:ext cx="182880" cy="182880"/>
+          </a:xfrm>
+          <a:prstGeom prst="ellipse">
+            <a:avLst/>
+          </a:prstGeom>
+          <a:solidFill>
+            <a:srgbClr val="E45A3E"/>
+          </a:solidFill>
+        </p:spPr>
+        <p:txBody>
+          <a:bodyPr rtlCol="0" anchor="ctr"/>
+          <a:lstStyle/>
+          <a:p/>
+        </p:txBody>
+      </p:sp>
+      <p:sp>
+        <p:nvSpPr>
+          <p:cNvPr id="5" name="TextBox 5"/>
+          <p:cNvSpPr txBox="1"/>
+          <p:nvPr/>
+        </p:nvSpPr>
+        <p:spPr>
+          <a:xfrm>
+            <a:off x="960120" y="347472"/>
+            <a:ext cx="6858000" cy="310896"/>
+          </a:xfrm>
+          <a:prstGeom prst="rect">
+            <a:avLst/>
+          </a:prstGeom>
+        </p:spPr>
+        <p:txBody>
+          <a:bodyPr wrap="square" rtlCol="0">
+            <a:spAutoFit/>
+          </a:bodyPr>
+          <a:lstStyle/>
+          <a:p>
+            <a:r>
+              <a:rPr b="1" sz="1500" spc="240">
+                <a:solidFill>
+                  <a:srgbClr val="1746D1"/>
+                </a:solidFill>
+                <a:latin typeface="Aptos"/>
+              </a:rPr>
+              <a:t>START HERE</a:t>
+            </a:r>
+          </a:p>
+        </p:txBody>
+      </p:sp>
+      <p:sp>
+        <p:nvSpPr>
+          <p:cNvPr id="6" name="TextBox 6"/>
+          <p:cNvSpPr txBox="1"/>
+          <p:nvPr/>
+        </p:nvSpPr>
+        <p:spPr>
+          <a:xfrm>
+            <a:off x="685800" y="754380"/>
+            <a:ext cx="4572000" cy="1280160"/>
+          </a:xfrm>
+          <a:prstGeom prst="rect">
+            <a:avLst/>
+          </a:prstGeom>
+        </p:spPr>
+        <p:txBody>
+          <a:bodyPr wrap="square" rtlCol="0">
+            <a:spAutoFit/>
+          </a:bodyPr>
+          <a:lstStyle/>
+          <a:p>
+            <a:r>
+              <a:rPr b="1" sz="3600" spc="-60">
+                <a:solidFill>
+                  <a:srgbClr val="172033"/>
+                </a:solidFill>
+                <a:latin typeface="Aptos Display"/>
+              </a:rPr>
+              <a:t>Scan once. Keep it open.</a:t>
+            </a:r>
+          </a:p>
+        </p:txBody>
+      </p:sp>
+      <p:sp>
+        <p:nvSpPr>
+          <p:cNvPr id="7" name="TextBox 7"/>
+          <p:cNvSpPr txBox="1"/>
+          <p:nvPr/>
+        </p:nvSpPr>
+        <p:spPr>
+          <a:xfrm>
+            <a:off x="685800" y="2286000"/>
+            <a:ext cx="4206240" cy="2377440"/>
+          </a:xfrm>
+          <a:prstGeom prst="rect">
+            <a:avLst/>
+          </a:prstGeom>
+        </p:spPr>
+        <p:txBody>
+          <a:bodyPr wrap="square" rtlCol="0">
+            <a:spAutoFit/>
+          </a:bodyPr>
+          <a:lstStyle/>
+          <a:p>
+            <a:r>
+              <a:rPr sz="2000">
+                <a:solidFill>
+                  <a:srgbClr val="455166"/>
+                </a:solidFill>
+                <a:latin typeface="Aptos"/>
+              </a:rPr>
+              <a:t>Preparation, both labs, resources.</a:t>
+            </a:r>
+          </a:p>
+          <a:p>
+            <a:r>
+              <a:rPr sz="2000">
+                <a:solidFill>
+                  <a:srgbClr val="455166"/>
+                </a:solidFill>
+                <a:latin typeface="Aptos"/>
+              </a:rPr>
+              <a:t>Open it on your laptop before we begin.</a:t>
+            </a:r>
+          </a:p>
+          <a:p>
+            <a:r>
+              <a:rPr sz="2000">
+                <a:solidFill>
+                  <a:srgbClr val="455166"/>
+                </a:solidFill>
+                <a:latin typeface="Aptos"/>
+              </a:rPr>
+              <a:t>Progress saves in your browser.</a:t>
+            </a:r>
+          </a:p>
+        </p:txBody>
+      </p:sp>
+      <p:sp>
+        <p:nvSpPr>
+          <p:cNvPr id="8" name="Shape 8"/>
+          <p:cNvSpPr/>
+          <p:nvPr/>
+        </p:nvSpPr>
+        <p:spPr>
+          <a:xfrm>
+            <a:off x="685800" y="4937760"/>
+            <a:ext cx="7772400" cy="914400"/>
+          </a:xfrm>
+          <a:prstGeom prst="roundRect">
+            <a:avLst/>
+          </a:prstGeom>
+          <a:solidFill>
+            <a:srgbClr val="E8F0FF"/>
+          </a:solidFill>
+        </p:spPr>
+        <p:txBody>
+          <a:bodyPr rtlCol="0" anchor="ctr"/>
+          <a:lstStyle/>
+          <a:p>
+            <a:r>
+              <a:rPr b="1" sz="1900">
+                <a:solidFill>
+                  <a:srgbClr val="1746D1"/>
+                </a:solidFill>
+                <a:latin typeface="Aptos"/>
+              </a:rPr>
+              <a:t>WORKSHOP  ·  aka.ms/ndc-oslo-copilot-workshop</a:t>
+            </a:r>
+          </a:p>
+        </p:txBody>
+      </p:sp>
+      <p:sp>
+        <p:nvSpPr>
+          <p:cNvPr id="9" name="TextBox 9"/>
+          <p:cNvSpPr txBox="1"/>
+          <p:nvPr/>
+        </p:nvSpPr>
+        <p:spPr>
+          <a:xfrm>
+            <a:off x="685800" y="6300216"/>
+            <a:ext cx="6858000" cy="320040"/>
+          </a:xfrm>
+          <a:prstGeom prst="rect">
+            <a:avLst/>
+          </a:prstGeom>
+        </p:spPr>
+        <p:txBody>
+          <a:bodyPr wrap="square" rtlCol="0">
+            <a:spAutoFit/>
+          </a:bodyPr>
+          <a:lstStyle/>
+          <a:p>
+            <a:r>
+              <a:rPr b="1" sz="1200" spc="120">
+                <a:solidFill>
+                  <a:srgbClr val="7A8497"/>
+                </a:solidFill>
+                <a:latin typeface="Aptos"/>
+              </a:rPr>
+              <a:t>NDC OSLO × GITHUB COPILOT WORKSHOP</a:t>
+            </a:r>
+          </a:p>
+        </p:txBody>
+      </p:sp>
+      <p:sp>
+        <p:nvSpPr>
+          <p:cNvPr id="10" name="TextBox 10"/>
+          <p:cNvSpPr txBox="1"/>
+          <p:nvPr/>
+        </p:nvSpPr>
+        <p:spPr>
+          <a:xfrm>
+            <a:off x="8046720" y="6300216"/>
+            <a:ext cx="640080" cy="320040"/>
+          </a:xfrm>
+          <a:prstGeom prst="rect">
+            <a:avLst/>
+          </a:prstGeom>
+        </p:spPr>
+        <p:txBody>
+          <a:bodyPr wrap="square" rtlCol="0">
+            <a:spAutoFit/>
+          </a:bodyPr>
+          <a:lstStyle/>
+          <a:p>
+            <a:r>
+              <a:rPr b="1" sz="1300">
+                <a:solidFill>
+                  <a:srgbClr val="1746D1"/>
+                </a:solidFill>
+                <a:latin typeface="Aptos"/>
+              </a:rPr>
+              <a:t>03</a:t>
+            </a:r>
+          </a:p>
+        </p:txBody>
+      </p:sp>
+      <p:sp>
+        <p:nvSpPr>
+          <p:cNvPr id="11" name="Shape 11"/>
+          <p:cNvSpPr/>
+          <p:nvPr/>
+        </p:nvSpPr>
+        <p:spPr>
+          <a:xfrm>
+            <a:off x="5257800" y="1143000"/>
+            <a:ext cx="3200400" cy="3657600"/>
+          </a:xfrm>
+          <a:prstGeom prst="roundRect">
+            <a:avLst/>
+          </a:prstGeom>
+          <a:solidFill>
+            <a:srgbClr val="E8F0FF"/>
+          </a:solidFill>
+        </p:spPr>
+        <p:txBody>
+          <a:bodyPr rtlCol="0" anchor="ctr"/>
+          <a:lstStyle/>
+          <a:p/>
+        </p:txBody>
+      </p:sp>
       <p:pic>
         <p:nvPicPr>
           <p:cNvPr id="13" name="Picture 13"/>
@@ -9620,6 +10752,66 @@
           </a:prstGeom>
         </p:spPr>
       </p:pic>
+      <p:sp>
+        <p:nvSpPr>
+          <p:cNvPr id="14" name="Shape 14"/>
+          <p:cNvSpPr/>
+          <p:nvPr/>
+        </p:nvSpPr>
+        <p:spPr>
+          <a:xfrm>
+            <a:off x="685800" y="2011680"/>
+            <a:ext cx="594360" cy="54864"/>
+          </a:xfrm>
+          <a:prstGeom prst="rect">
+            <a:avLst/>
+          </a:prstGeom>
+          <a:solidFill>
+            <a:srgbClr val="E45A3E"/>
+          </a:solidFill>
+          <a:ln>
+            <a:noFill/>
+          </a:ln>
+        </p:spPr>
+        <p:txBody>
+          <a:bodyPr rtlCol="0" anchor="ctr"/>
+          <a:lstStyle/>
+          <a:p/>
+        </p:txBody>
+      </p:sp>
+      <p:sp>
+        <p:nvSpPr>
+          <p:cNvPr id="15" name="TextBox 15"/>
+          <p:cNvSpPr txBox="1"/>
+          <p:nvPr/>
+        </p:nvSpPr>
+        <p:spPr>
+          <a:xfrm>
+            <a:off x="5669280" y="4114800"/>
+            <a:ext cx="2423160" cy="320040"/>
+          </a:xfrm>
+          <a:prstGeom prst="rect">
+            <a:avLst/>
+          </a:prstGeom>
+        </p:spPr>
+        <p:txBody>
+          <a:bodyPr wrap="square" rtlCol="0">
+            <a:spAutoFit/>
+          </a:bodyPr>
+          <a:lstStyle/>
+          <a:p>
+            <a:r>
+              <a:rPr b="1" sz="1400" spc="200">
+                <a:solidFill>
+                  <a:srgbClr val="1746D1"/>
+                </a:solidFill>
+                <a:latin typeface="Aptos"/>
+              </a:rPr>
+              <a:t>SCAN TO OPEN</a:t>
+            </a:r>
+          </a:p>
+        </p:txBody>
+      </p:sp>
     </p:spTree>
   </p:cSld>
   <p:clrMapOvr>
@@ -9718,23 +10910,23 @@
         </p:nvSpPr>
         <p:spPr>
           <a:xfrm>
-            <a:off x="960120" y="365760"/>
-            <a:ext cx="5486400" cy="274320"/>
-          </a:xfrm>
-          <a:prstGeom prst="rect">
-            <a:avLst/>
-          </a:prstGeom>
-        </p:spPr>
-        <p:txBody>
-          <a:bodyPr wrap="square" rtlCol="0">
-            <a:spAutoFit/>
-          </a:bodyPr>
-          <a:lstStyle/>
-          <a:p>
-            <a:r>
-              <a:rPr b="1" sz="1200" spc="120">
-                <a:solidFill>
-                  <a:srgbClr val="1746D1"/>
+            <a:off x="960120" y="347472"/>
+            <a:ext cx="6858000" cy="310896"/>
+          </a:xfrm>
+          <a:prstGeom prst="rect">
+            <a:avLst/>
+          </a:prstGeom>
+        </p:spPr>
+        <p:txBody>
+          <a:bodyPr wrap="square" rtlCol="0">
+            <a:spAutoFit/>
+          </a:bodyPr>
+          <a:lstStyle/>
+          <a:p>
+            <a:r>
+              <a:rPr b="1" sz="1500" spc="240">
+                <a:solidFill>
+                  <a:srgbClr val="C53F25"/>
                 </a:solidFill>
                 <a:latin typeface="Aptos"/>
               </a:rPr>
@@ -9751,21 +10943,21 @@
         </p:nvSpPr>
         <p:spPr>
           <a:xfrm>
-            <a:off x="685800" y="868680"/>
-            <a:ext cx="7772400" cy="1005840"/>
-          </a:xfrm>
-          <a:prstGeom prst="rect">
-            <a:avLst/>
-          </a:prstGeom>
-        </p:spPr>
-        <p:txBody>
-          <a:bodyPr wrap="square" rtlCol="0">
-            <a:spAutoFit/>
-          </a:bodyPr>
-          <a:lstStyle/>
-          <a:p>
-            <a:r>
-              <a:rPr b="1" sz="3400" spc="-80">
+            <a:off x="685800" y="754380"/>
+            <a:ext cx="7772400" cy="1188720"/>
+          </a:xfrm>
+          <a:prstGeom prst="rect">
+            <a:avLst/>
+          </a:prstGeom>
+        </p:spPr>
+        <p:txBody>
+          <a:bodyPr wrap="square" rtlCol="0">
+            <a:spAutoFit/>
+          </a:bodyPr>
+          <a:lstStyle/>
+          <a:p>
+            <a:r>
+              <a:rPr b="1" sz="4200" spc="-60">
                 <a:solidFill>
                   <a:srgbClr val="172033"/>
                 </a:solidFill>
@@ -9784,32 +10976,32 @@
         </p:nvSpPr>
         <p:spPr>
           <a:xfrm>
-            <a:off x="685800" y="2103120"/>
-            <a:ext cx="7772400" cy="1645920"/>
-          </a:xfrm>
-          <a:prstGeom prst="rect">
-            <a:avLst/>
-          </a:prstGeom>
-        </p:spPr>
-        <p:txBody>
-          <a:bodyPr wrap="square" rtlCol="0">
-            <a:spAutoFit/>
-          </a:bodyPr>
-          <a:lstStyle/>
-          <a:p>
-            <a:r>
-              <a:rPr sz="2000">
+            <a:off x="685800" y="2194560"/>
+            <a:ext cx="7772400" cy="1371600"/>
+          </a:xfrm>
+          <a:prstGeom prst="rect">
+            <a:avLst/>
+          </a:prstGeom>
+        </p:spPr>
+        <p:txBody>
+          <a:bodyPr wrap="square" rtlCol="0">
+            <a:spAutoFit/>
+          </a:bodyPr>
+          <a:lstStyle/>
+          <a:p>
+            <a:r>
+              <a:rPr sz="2200">
                 <a:solidFill>
                   <a:srgbClr val="455166"/>
                 </a:solidFill>
                 <a:latin typeface="Aptos"/>
               </a:rPr>
-              <a:t>Use the workshop redemption code provided by the presenters.</a:t>
-            </a:r>
-          </a:p>
-          <a:p>
-            <a:r>
-              <a:rPr sz="2000">
+              <a:t>Use the redemption code shown by the presenters.</a:t>
+            </a:r>
+          </a:p>
+          <a:p>
+            <a:r>
+              <a:rPr sz="2200">
                 <a:solidFill>
                   <a:srgbClr val="455166"/>
                 </a:solidFill>
@@ -9820,13 +11012,13 @@
           </a:p>
           <a:p>
             <a:r>
-              <a:rPr sz="2000">
+              <a:rPr sz="2200">
                 <a:solidFill>
                   <a:srgbClr val="455166"/>
                 </a:solidFill>
                 <a:latin typeface="Aptos"/>
               </a:rPr>
-              <a:t>Enter the code at github.com/redeem and follow the confirmation flow.</a:t>
+              <a:t>Enter it at github.com/redeem and confirm.</a:t>
             </a:r>
           </a:p>
         </p:txBody>
@@ -9846,7 +11038,7 @@
             <a:avLst/>
           </a:prstGeom>
           <a:solidFill>
-            <a:srgbClr val="E8F0FF"/>
+            <a:srgbClr val="FFF3EF"/>
           </a:solidFill>
         </p:spPr>
         <p:txBody>
@@ -9854,13 +11046,13 @@
           <a:lstStyle/>
           <a:p>
             <a:r>
-              <a:rPr b="1" sz="1600">
-                <a:solidFill>
-                  <a:srgbClr val="1746D1"/>
-                </a:solidFill>
-                <a:latin typeface="Aptos"/>
-              </a:rPr>
-              <a:t>REDEEM  ·  https://github.com/redeem</a:t>
+              <a:rPr b="1" sz="1900">
+                <a:solidFill>
+                  <a:srgbClr val="C53F25"/>
+                </a:solidFill>
+                <a:latin typeface="Aptos"/>
+              </a:rPr>
+              <a:t>REDEEM  ·  github.com/redeem</a:t>
             </a:r>
           </a:p>
         </p:txBody>
@@ -9873,21 +11065,21 @@
         </p:nvSpPr>
         <p:spPr>
           <a:xfrm>
-            <a:off x="685800" y="6355080"/>
-            <a:ext cx="6858000" cy="274320"/>
-          </a:xfrm>
-          <a:prstGeom prst="rect">
-            <a:avLst/>
-          </a:prstGeom>
-        </p:spPr>
-        <p:txBody>
-          <a:bodyPr wrap="square" rtlCol="0">
-            <a:spAutoFit/>
-          </a:bodyPr>
-          <a:lstStyle/>
-          <a:p>
-            <a:r>
-              <a:rPr b="1" sz="1000" spc="80">
+            <a:off x="685800" y="6300216"/>
+            <a:ext cx="6858000" cy="320040"/>
+          </a:xfrm>
+          <a:prstGeom prst="rect">
+            <a:avLst/>
+          </a:prstGeom>
+        </p:spPr>
+        <p:txBody>
+          <a:bodyPr wrap="square" rtlCol="0">
+            <a:spAutoFit/>
+          </a:bodyPr>
+          <a:lstStyle/>
+          <a:p>
+            <a:r>
+              <a:rPr b="1" sz="1200" spc="120">
                 <a:solidFill>
                   <a:srgbClr val="7A8497"/>
                 </a:solidFill>
@@ -9906,23 +11098,23 @@
         </p:nvSpPr>
         <p:spPr>
           <a:xfrm>
-            <a:off x="8230000" y="6355080"/>
-            <a:ext cx="457200" cy="274320"/>
-          </a:xfrm>
-          <a:prstGeom prst="rect">
-            <a:avLst/>
-          </a:prstGeom>
-        </p:spPr>
-        <p:txBody>
-          <a:bodyPr wrap="square" rtlCol="0">
-            <a:spAutoFit/>
-          </a:bodyPr>
-          <a:lstStyle/>
-          <a:p>
-            <a:r>
-              <a:rPr b="1" sz="1000">
-                <a:solidFill>
-                  <a:srgbClr val="1746D1"/>
+            <a:off x="8046720" y="6300216"/>
+            <a:ext cx="640080" cy="320040"/>
+          </a:xfrm>
+          <a:prstGeom prst="rect">
+            <a:avLst/>
+          </a:prstGeom>
+        </p:spPr>
+        <p:txBody>
+          <a:bodyPr wrap="square" rtlCol="0">
+            <a:spAutoFit/>
+          </a:bodyPr>
+          <a:lstStyle/>
+          <a:p>
+            <a:r>
+              <a:rPr b="1" sz="1300">
+                <a:solidFill>
+                  <a:srgbClr val="C53F25"/>
                 </a:solidFill>
                 <a:latin typeface="Aptos"/>
               </a:rPr>
@@ -9939,8 +11131,8 @@
         </p:nvSpPr>
         <p:spPr>
           <a:xfrm>
-            <a:off x="685800" y="3886200"/>
-            <a:ext cx="7772400" cy="822960"/>
+            <a:off x="685800" y="3749040"/>
+            <a:ext cx="7772400" cy="960120"/>
           </a:xfrm>
           <a:prstGeom prst="roundRect">
             <a:avLst/>
@@ -9959,15 +11151,42 @@
           <a:lstStyle/>
           <a:p>
             <a:r>
-              <a:rPr b="1" sz="2400" spc="150">
+              <a:rPr b="1" sz="3000" spc="120">
                 <a:solidFill>
                   <a:srgbClr val="C53F25"/>
                 </a:solidFill>
-                <a:latin typeface="Aptos Display"/>
-              </a:rPr>
-              <a:t>[ ADD REDEMPTION CODE ]</a:t>
-            </a:r>
-          </a:p>
+                <a:latin typeface="Aptos"/>
+              </a:rPr>
+              <a:t>[    ADD REDEMPTION CODE    ]</a:t>
+            </a:r>
+          </a:p>
+        </p:txBody>
+      </p:sp>
+      <p:sp>
+        <p:nvSpPr>
+          <p:cNvPr id="12" name="Shape 12"/>
+          <p:cNvSpPr/>
+          <p:nvPr/>
+        </p:nvSpPr>
+        <p:spPr>
+          <a:xfrm>
+            <a:off x="685800" y="2011680"/>
+            <a:ext cx="594360" cy="54864"/>
+          </a:xfrm>
+          <a:prstGeom prst="rect">
+            <a:avLst/>
+          </a:prstGeom>
+          <a:solidFill>
+            <a:srgbClr val="E45A3E"/>
+          </a:solidFill>
+          <a:ln>
+            <a:noFill/>
+          </a:ln>
+        </p:spPr>
+        <p:txBody>
+          <a:bodyPr rtlCol="0" anchor="ctr"/>
+          <a:lstStyle/>
+          <a:p/>
         </p:txBody>
       </p:sp>
     </p:spTree>
@@ -10379,21 +11598,21 @@
         </p:nvSpPr>
         <p:spPr>
           <a:xfrm>
-            <a:off x="960120" y="365760"/>
-            <a:ext cx="5486400" cy="274320"/>
-          </a:xfrm>
-          <a:prstGeom prst="rect">
-            <a:avLst/>
-          </a:prstGeom>
-        </p:spPr>
-        <p:txBody>
-          <a:bodyPr wrap="square" rtlCol="0">
-            <a:spAutoFit/>
-          </a:bodyPr>
-          <a:lstStyle/>
-          <a:p>
-            <a:r>
-              <a:rPr b="1" sz="1200" spc="120">
+            <a:off x="960120" y="347472"/>
+            <a:ext cx="6858000" cy="310896"/>
+          </a:xfrm>
+          <a:prstGeom prst="rect">
+            <a:avLst/>
+          </a:prstGeom>
+        </p:spPr>
+        <p:txBody>
+          <a:bodyPr wrap="square" rtlCol="0">
+            <a:spAutoFit/>
+          </a:bodyPr>
+          <a:lstStyle/>
+          <a:p>
+            <a:r>
+              <a:rPr b="1" sz="1500" spc="240">
                 <a:solidFill>
                   <a:srgbClr val="1746D1"/>
                 </a:solidFill>
@@ -10412,27 +11631,27 @@
         </p:nvSpPr>
         <p:spPr>
           <a:xfrm>
-            <a:off x="685800" y="868680"/>
-            <a:ext cx="7772400" cy="1005840"/>
-          </a:xfrm>
-          <a:prstGeom prst="rect">
-            <a:avLst/>
-          </a:prstGeom>
-        </p:spPr>
-        <p:txBody>
-          <a:bodyPr wrap="square" rtlCol="0">
-            <a:spAutoFit/>
-          </a:bodyPr>
-          <a:lstStyle/>
-          <a:p>
-            <a:r>
-              <a:rPr b="1" sz="3400" spc="-80">
+            <a:off x="685800" y="754380"/>
+            <a:ext cx="7772400" cy="1188720"/>
+          </a:xfrm>
+          <a:prstGeom prst="rect">
+            <a:avLst/>
+          </a:prstGeom>
+        </p:spPr>
+        <p:txBody>
+          <a:bodyPr wrap="square" rtlCol="0">
+            <a:spAutoFit/>
+          </a:bodyPr>
+          <a:lstStyle/>
+          <a:p>
+            <a:r>
+              <a:rPr b="1" sz="4200" spc="-60">
                 <a:solidFill>
                   <a:srgbClr val="172033"/>
                 </a:solidFill>
                 <a:latin typeface="Aptos Display"/>
               </a:rPr>
-              <a:t>VS Code lab: what we'll do</a:t>
+              <a:t>What we’ll do in VS Code</a:t>
             </a:r>
           </a:p>
         </p:txBody>
@@ -10445,49 +11664,49 @@
         </p:nvSpPr>
         <p:spPr>
           <a:xfrm>
-            <a:off x="685800" y="2103120"/>
-            <a:ext cx="7772400" cy="2377440"/>
-          </a:xfrm>
-          <a:prstGeom prst="rect">
-            <a:avLst/>
-          </a:prstGeom>
-        </p:spPr>
-        <p:txBody>
-          <a:bodyPr wrap="square" rtlCol="0">
-            <a:spAutoFit/>
-          </a:bodyPr>
-          <a:lstStyle/>
-          <a:p>
-            <a:r>
-              <a:rPr sz="2000">
+            <a:off x="1371600" y="2377440"/>
+            <a:ext cx="7086600" cy="792480"/>
+          </a:xfrm>
+          <a:prstGeom prst="rect">
+            <a:avLst/>
+          </a:prstGeom>
+        </p:spPr>
+        <p:txBody>
+          <a:bodyPr wrap="square" rtlCol="0">
+            <a:spAutoFit/>
+          </a:bodyPr>
+          <a:lstStyle/>
+          <a:p>
+            <a:r>
+              <a:rPr b="1" sz="2400">
+                <a:solidFill>
+                  <a:srgbClr val="172033"/>
+                </a:solidFill>
+                <a:latin typeface="Aptos"/>
+              </a:rPr>
+              <a:t>Engineer the context</a:t>
+            </a:r>
+          </a:p>
+          <a:p>
+            <a:r>
+              <a:rPr sz="1700">
                 <a:solidFill>
                   <a:srgbClr val="455166"/>
                 </a:solidFill>
                 <a:latin typeface="Aptos"/>
               </a:rPr>
-              <a:t>Engineer context  ·  /setup, /init, dogfooding, and reusable skills.</a:t>
-            </a:r>
-          </a:p>
-          <a:p>
-            <a:r>
-              <a:rPr sz="2000">
+              <a:t>/setup, /init, dogfooding, and reusable custom skills.</a:t>
+            </a:r>
+          </a:p>
+          <a:p>
+            <a:r>
+              <a:rPr sz="600">
                 <a:solidFill>
                   <a:srgbClr val="455166"/>
                 </a:solidFill>
                 <a:latin typeface="Aptos"/>
               </a:rPr>
-              <a:t>Design in Plan mode  ·  comment on real UI  ·  preserve design instructions.</a:t>
-            </a:r>
-          </a:p>
-          <a:p>
-            <a:r>
-              <a:rPr sz="2000">
-                <a:solidFill>
-                  <a:srgbClr val="455166"/>
-                </a:solidFill>
-                <a:latin typeface="Aptos"/>
-              </a:rPr>
-              <a:t>Orchestrate Quiz Master, Pixel Jam, TDD, hooks, debug logs, and UX review.</a:t>
+              <a:t xml:space="preserve"> </a:t>
             </a:r>
           </a:p>
         </p:txBody>
@@ -10515,13 +11734,13 @@
           <a:lstStyle/>
           <a:p>
             <a:r>
-              <a:rPr b="1" sz="1600">
+              <a:rPr b="1" sz="1900">
                 <a:solidFill>
                   <a:srgbClr val="1746D1"/>
                 </a:solidFill>
                 <a:latin typeface="Aptos"/>
               </a:rPr>
-              <a:t>BUILD  ·  Redesign and extend Bingo Mixer while making agent behavior observable.</a:t>
+              <a:t>BUILD  ·  Extend Bingo Mixer with observable agent behavior.</a:t>
             </a:r>
           </a:p>
         </p:txBody>
@@ -10534,21 +11753,21 @@
         </p:nvSpPr>
         <p:spPr>
           <a:xfrm>
-            <a:off x="685800" y="6355080"/>
-            <a:ext cx="6858000" cy="274320"/>
-          </a:xfrm>
-          <a:prstGeom prst="rect">
-            <a:avLst/>
-          </a:prstGeom>
-        </p:spPr>
-        <p:txBody>
-          <a:bodyPr wrap="square" rtlCol="0">
-            <a:spAutoFit/>
-          </a:bodyPr>
-          <a:lstStyle/>
-          <a:p>
-            <a:r>
-              <a:rPr b="1" sz="1000" spc="80">
+            <a:off x="685800" y="6300216"/>
+            <a:ext cx="6858000" cy="320040"/>
+          </a:xfrm>
+          <a:prstGeom prst="rect">
+            <a:avLst/>
+          </a:prstGeom>
+        </p:spPr>
+        <p:txBody>
+          <a:bodyPr wrap="square" rtlCol="0">
+            <a:spAutoFit/>
+          </a:bodyPr>
+          <a:lstStyle/>
+          <a:p>
+            <a:r>
+              <a:rPr b="1" sz="1200" spc="120">
                 <a:solidFill>
                   <a:srgbClr val="7A8497"/>
                 </a:solidFill>
@@ -10567,21 +11786,21 @@
         </p:nvSpPr>
         <p:spPr>
           <a:xfrm>
-            <a:off x="8230000" y="6355080"/>
-            <a:ext cx="457200" cy="274320"/>
-          </a:xfrm>
-          <a:prstGeom prst="rect">
-            <a:avLst/>
-          </a:prstGeom>
-        </p:spPr>
-        <p:txBody>
-          <a:bodyPr wrap="square" rtlCol="0">
-            <a:spAutoFit/>
-          </a:bodyPr>
-          <a:lstStyle/>
-          <a:p>
-            <a:r>
-              <a:rPr b="1" sz="1000">
+            <a:off x="8046720" y="6300216"/>
+            <a:ext cx="640080" cy="320040"/>
+          </a:xfrm>
+          <a:prstGeom prst="rect">
+            <a:avLst/>
+          </a:prstGeom>
+        </p:spPr>
+        <p:txBody>
+          <a:bodyPr wrap="square" rtlCol="0">
+            <a:spAutoFit/>
+          </a:bodyPr>
+          <a:lstStyle/>
+          <a:p>
+            <a:r>
+              <a:rPr b="1" sz="1300">
                 <a:solidFill>
                   <a:srgbClr val="1746D1"/>
                 </a:solidFill>
@@ -10590,6 +11809,274 @@
               <a:t>05</a:t>
             </a:r>
           </a:p>
+        </p:txBody>
+      </p:sp>
+      <p:sp>
+        <p:nvSpPr>
+          <p:cNvPr id="11" name="TextBox 11"/>
+          <p:cNvSpPr txBox="1"/>
+          <p:nvPr/>
+        </p:nvSpPr>
+        <p:spPr>
+          <a:xfrm>
+            <a:off x="1371600" y="3200400"/>
+            <a:ext cx="7086600" cy="792480"/>
+          </a:xfrm>
+          <a:prstGeom prst="rect">
+            <a:avLst/>
+          </a:prstGeom>
+        </p:spPr>
+        <p:txBody>
+          <a:bodyPr wrap="square" rtlCol="0">
+            <a:spAutoFit/>
+          </a:bodyPr>
+          <a:lstStyle/>
+          <a:p>
+            <a:r>
+              <a:rPr b="1" sz="2400">
+                <a:solidFill>
+                  <a:srgbClr val="172033"/>
+                </a:solidFill>
+                <a:latin typeface="Aptos"/>
+              </a:rPr>
+              <a:t>Design in Plan mode</a:t>
+            </a:r>
+          </a:p>
+          <a:p>
+            <a:r>
+              <a:rPr sz="1700">
+                <a:solidFill>
+                  <a:srgbClr val="455166"/>
+                </a:solidFill>
+                <a:latin typeface="Aptos"/>
+              </a:rPr>
+              <a:t>Comment on real UI and keep your design instructions.</a:t>
+            </a:r>
+          </a:p>
+        </p:txBody>
+      </p:sp>
+      <p:sp>
+        <p:nvSpPr>
+          <p:cNvPr id="12" name="TextBox 12"/>
+          <p:cNvSpPr txBox="1"/>
+          <p:nvPr/>
+        </p:nvSpPr>
+        <p:spPr>
+          <a:xfrm>
+            <a:off x="1371600" y="4023360"/>
+            <a:ext cx="7086600" cy="792480"/>
+          </a:xfrm>
+          <a:prstGeom prst="rect">
+            <a:avLst/>
+          </a:prstGeom>
+        </p:spPr>
+        <p:txBody>
+          <a:bodyPr wrap="square" rtlCol="0">
+            <a:spAutoFit/>
+          </a:bodyPr>
+          <a:lstStyle/>
+          <a:p>
+            <a:r>
+              <a:rPr b="1" sz="2400">
+                <a:solidFill>
+                  <a:srgbClr val="172033"/>
+                </a:solidFill>
+                <a:latin typeface="Aptos"/>
+              </a:rPr>
+              <a:t>Orchestrate the agents</a:t>
+            </a:r>
+          </a:p>
+          <a:p>
+            <a:r>
+              <a:rPr sz="1700">
+                <a:solidFill>
+                  <a:srgbClr val="455166"/>
+                </a:solidFill>
+                <a:latin typeface="Aptos"/>
+              </a:rPr>
+              <a:t>Quiz Master, Pixel Jam, TDD, hooks, logs, and UX review.</a:t>
+            </a:r>
+          </a:p>
+        </p:txBody>
+      </p:sp>
+      <p:sp>
+        <p:nvSpPr>
+          <p:cNvPr id="13" name="TextBox 13"/>
+          <p:cNvSpPr txBox="1"/>
+          <p:nvPr/>
+        </p:nvSpPr>
+        <p:spPr>
+          <a:xfrm>
+            <a:off x="685800" y="2465832"/>
+            <a:ext cx="594360" cy="320040"/>
+          </a:xfrm>
+          <a:prstGeom prst="rect">
+            <a:avLst/>
+          </a:prstGeom>
+        </p:spPr>
+        <p:txBody>
+          <a:bodyPr wrap="square" rtlCol="0">
+            <a:spAutoFit/>
+          </a:bodyPr>
+          <a:lstStyle/>
+          <a:p>
+            <a:r>
+              <a:rPr b="1" sz="1700" spc="60">
+                <a:solidFill>
+                  <a:srgbClr val="1746D1"/>
+                </a:solidFill>
+                <a:latin typeface="Aptos"/>
+              </a:rPr>
+              <a:t>01</a:t>
+            </a:r>
+          </a:p>
+        </p:txBody>
+      </p:sp>
+      <p:sp>
+        <p:nvSpPr>
+          <p:cNvPr id="14" name="TextBox 14"/>
+          <p:cNvSpPr txBox="1"/>
+          <p:nvPr/>
+        </p:nvSpPr>
+        <p:spPr>
+          <a:xfrm>
+            <a:off x="685800" y="3288792"/>
+            <a:ext cx="594360" cy="320040"/>
+          </a:xfrm>
+          <a:prstGeom prst="rect">
+            <a:avLst/>
+          </a:prstGeom>
+        </p:spPr>
+        <p:txBody>
+          <a:bodyPr wrap="square" rtlCol="0">
+            <a:spAutoFit/>
+          </a:bodyPr>
+          <a:lstStyle/>
+          <a:p>
+            <a:r>
+              <a:rPr b="1" sz="1700" spc="60">
+                <a:solidFill>
+                  <a:srgbClr val="1746D1"/>
+                </a:solidFill>
+                <a:latin typeface="Aptos"/>
+              </a:rPr>
+              <a:t>02</a:t>
+            </a:r>
+          </a:p>
+        </p:txBody>
+      </p:sp>
+      <p:sp>
+        <p:nvSpPr>
+          <p:cNvPr id="15" name="TextBox 15"/>
+          <p:cNvSpPr txBox="1"/>
+          <p:nvPr/>
+        </p:nvSpPr>
+        <p:spPr>
+          <a:xfrm>
+            <a:off x="685800" y="4111752"/>
+            <a:ext cx="594360" cy="320040"/>
+          </a:xfrm>
+          <a:prstGeom prst="rect">
+            <a:avLst/>
+          </a:prstGeom>
+        </p:spPr>
+        <p:txBody>
+          <a:bodyPr wrap="square" rtlCol="0">
+            <a:spAutoFit/>
+          </a:bodyPr>
+          <a:lstStyle/>
+          <a:p>
+            <a:r>
+              <a:rPr b="1" sz="1700" spc="60">
+                <a:solidFill>
+                  <a:srgbClr val="1746D1"/>
+                </a:solidFill>
+                <a:latin typeface="Aptos"/>
+              </a:rPr>
+              <a:t>03</a:t>
+            </a:r>
+          </a:p>
+        </p:txBody>
+      </p:sp>
+      <p:sp>
+        <p:nvSpPr>
+          <p:cNvPr id="16" name="Shape 16"/>
+          <p:cNvSpPr/>
+          <p:nvPr/>
+        </p:nvSpPr>
+        <p:spPr>
+          <a:xfrm>
+            <a:off x="685800" y="3063240"/>
+            <a:ext cx="7772400" cy="12700"/>
+          </a:xfrm>
+          <a:prstGeom prst="rect">
+            <a:avLst/>
+          </a:prstGeom>
+          <a:solidFill>
+            <a:srgbClr val="CFD8E8"/>
+          </a:solidFill>
+          <a:ln>
+            <a:noFill/>
+          </a:ln>
+        </p:spPr>
+        <p:txBody>
+          <a:bodyPr rtlCol="0" anchor="ctr"/>
+          <a:lstStyle/>
+          <a:p/>
+        </p:txBody>
+      </p:sp>
+      <p:sp>
+        <p:nvSpPr>
+          <p:cNvPr id="17" name="Shape 17"/>
+          <p:cNvSpPr/>
+          <p:nvPr/>
+        </p:nvSpPr>
+        <p:spPr>
+          <a:xfrm>
+            <a:off x="685800" y="3886200"/>
+            <a:ext cx="7772400" cy="12700"/>
+          </a:xfrm>
+          <a:prstGeom prst="rect">
+            <a:avLst/>
+          </a:prstGeom>
+          <a:solidFill>
+            <a:srgbClr val="CFD8E8"/>
+          </a:solidFill>
+          <a:ln>
+            <a:noFill/>
+          </a:ln>
+        </p:spPr>
+        <p:txBody>
+          <a:bodyPr rtlCol="0" anchor="ctr"/>
+          <a:lstStyle/>
+          <a:p/>
+        </p:txBody>
+      </p:sp>
+      <p:sp>
+        <p:nvSpPr>
+          <p:cNvPr id="18" name="Shape 18"/>
+          <p:cNvSpPr/>
+          <p:nvPr/>
+        </p:nvSpPr>
+        <p:spPr>
+          <a:xfrm>
+            <a:off x="685800" y="2011680"/>
+            <a:ext cx="594360" cy="54864"/>
+          </a:xfrm>
+          <a:prstGeom prst="rect">
+            <a:avLst/>
+          </a:prstGeom>
+          <a:solidFill>
+            <a:srgbClr val="E45A3E"/>
+          </a:solidFill>
+          <a:ln>
+            <a:noFill/>
+          </a:ln>
+        </p:spPr>
+        <p:txBody>
+          <a:bodyPr rtlCol="0" anchor="ctr"/>
+          <a:lstStyle/>
+          <a:p/>
         </p:txBody>
       </p:sp>
     </p:spTree>
